--- a/slides/double_descent_presentation.pptx
+++ b/slides/double_descent_presentation.pptx
@@ -134,6 +134,9 @@
         </p15:guide>
       </p15:sldGuideLst>
     </p:ext>
+    <p:ext uri="{2D200454-40CA-4A62-9FC3-DE9A4176ACB9}">
+      <p15:notesGuideLst xmlns:p15="http://schemas.microsoft.com/office/powerpoint/2012/main"/>
+    </p:ext>
   </p:extLst>
 </p:presentation>
 </file>
@@ -141,7 +144,7 @@
 <file path=ppt/revisionInfo.xml><?xml version="1.0" encoding="utf-8"?>
 <p1510:revInfo xmlns:a="http://schemas.openxmlformats.org/drawingml/2006/main" xmlns:r="http://schemas.openxmlformats.org/officeDocument/2006/relationships" xmlns:p1510="http://schemas.microsoft.com/office/powerpoint/2015/10/main">
   <p1510:revLst>
-    <p1510:client id="{C78EDCF7-2E7A-475C-B070-2104BFA8BAA3}" v="18" dt="2026-03-13T11:04:18.436"/>
+    <p1510:client id="{C78EDCF7-2E7A-475C-B070-2104BFA8BAA3}" v="19" dt="2026-03-13T12:26:17.995"/>
   </p1510:revLst>
 </p1510:revInfo>
 </file>
@@ -151,7 +154,7 @@
   <pc:docChgLst>
     <pc:chgData name="Le Jiayang" userId="72dc08ead7328938" providerId="LiveId" clId="{2E694533-A3D7-44F0-8378-4BF09FAADAF7}"/>
     <pc:docChg chg="undo custSel delSld modSld modMainMaster">
-      <pc:chgData name="Le Jiayang" userId="72dc08ead7328938" providerId="LiveId" clId="{2E694533-A3D7-44F0-8378-4BF09FAADAF7}" dt="2026-03-13T12:12:33.774" v="164" actId="207"/>
+      <pc:chgData name="Le Jiayang" userId="72dc08ead7328938" providerId="LiveId" clId="{2E694533-A3D7-44F0-8378-4BF09FAADAF7}" dt="2026-03-16T11:52:16.600" v="184" actId="1582"/>
       <pc:docMkLst>
         <pc:docMk/>
       </pc:docMkLst>
@@ -257,8 +260,8 @@
           </ac:spMkLst>
         </pc:spChg>
       </pc:sldChg>
-      <pc:sldChg chg="modSp mod setBg">
-        <pc:chgData name="Le Jiayang" userId="72dc08ead7328938" providerId="LiveId" clId="{2E694533-A3D7-44F0-8378-4BF09FAADAF7}" dt="2026-03-13T11:45:51.975" v="139" actId="1076"/>
+      <pc:sldChg chg="addSp modSp mod setBg">
+        <pc:chgData name="Le Jiayang" userId="72dc08ead7328938" providerId="LiveId" clId="{2E694533-A3D7-44F0-8378-4BF09FAADAF7}" dt="2026-03-16T11:52:16.600" v="184" actId="1582"/>
         <pc:sldMkLst>
           <pc:docMk/>
           <pc:sldMk cId="0" sldId="258"/>
@@ -271,6 +274,22 @@
             <ac:spMk id="17" creationId="{00000000-0000-0000-0000-000000000000}"/>
           </ac:spMkLst>
         </pc:spChg>
+        <pc:cxnChg chg="add mod">
+          <ac:chgData name="Le Jiayang" userId="72dc08ead7328938" providerId="LiveId" clId="{2E694533-A3D7-44F0-8378-4BF09FAADAF7}" dt="2026-03-16T11:51:54.485" v="180" actId="14100"/>
+          <ac:cxnSpMkLst>
+            <pc:docMk/>
+            <pc:sldMk cId="0" sldId="258"/>
+            <ac:cxnSpMk id="22" creationId="{F8570659-505C-6805-169B-0C78274414D4}"/>
+          </ac:cxnSpMkLst>
+        </pc:cxnChg>
+        <pc:cxnChg chg="add mod">
+          <ac:chgData name="Le Jiayang" userId="72dc08ead7328938" providerId="LiveId" clId="{2E694533-A3D7-44F0-8378-4BF09FAADAF7}" dt="2026-03-16T11:52:16.600" v="184" actId="1582"/>
+          <ac:cxnSpMkLst>
+            <pc:docMk/>
+            <pc:sldMk cId="0" sldId="258"/>
+            <ac:cxnSpMk id="25" creationId="{3C060030-A995-4AFC-1857-06003F4F25EB}"/>
+          </ac:cxnSpMkLst>
+        </pc:cxnChg>
       </pc:sldChg>
       <pc:sldChg chg="setBg">
         <pc:chgData name="Le Jiayang" userId="72dc08ead7328938" providerId="LiveId" clId="{2E694533-A3D7-44F0-8378-4BF09FAADAF7}" dt="2026-03-13T10:57:37.500" v="5"/>
@@ -286,12 +305,20 @@
           <pc:sldMk cId="0" sldId="260"/>
         </pc:sldMkLst>
       </pc:sldChg>
-      <pc:sldChg chg="setBg">
-        <pc:chgData name="Le Jiayang" userId="72dc08ead7328938" providerId="LiveId" clId="{2E694533-A3D7-44F0-8378-4BF09FAADAF7}" dt="2026-03-13T10:57:37.500" v="5"/>
+      <pc:sldChg chg="modSp mod setBg">
+        <pc:chgData name="Le Jiayang" userId="72dc08ead7328938" providerId="LiveId" clId="{2E694533-A3D7-44F0-8378-4BF09FAADAF7}" dt="2026-03-16T11:50:03.129" v="165" actId="20577"/>
         <pc:sldMkLst>
           <pc:docMk/>
           <pc:sldMk cId="0" sldId="261"/>
         </pc:sldMkLst>
+        <pc:spChg chg="mod">
+          <ac:chgData name="Le Jiayang" userId="72dc08ead7328938" providerId="LiveId" clId="{2E694533-A3D7-44F0-8378-4BF09FAADAF7}" dt="2026-03-16T11:50:03.129" v="165" actId="20577"/>
+          <ac:spMkLst>
+            <pc:docMk/>
+            <pc:sldMk cId="0" sldId="261"/>
+            <ac:spMk id="16" creationId="{00000000-0000-0000-0000-000000000000}"/>
+          </ac:spMkLst>
+        </pc:spChg>
       </pc:sldChg>
       <pc:sldChg chg="modSp mod setBg">
         <pc:chgData name="Le Jiayang" userId="72dc08ead7328938" providerId="LiveId" clId="{2E694533-A3D7-44F0-8378-4BF09FAADAF7}" dt="2026-03-13T10:57:37.500" v="5"/>
@@ -308,12 +335,20 @@
           </ac:spMkLst>
         </pc:spChg>
       </pc:sldChg>
-      <pc:sldChg chg="setBg">
-        <pc:chgData name="Le Jiayang" userId="72dc08ead7328938" providerId="LiveId" clId="{2E694533-A3D7-44F0-8378-4BF09FAADAF7}" dt="2026-03-13T10:57:37.500" v="5"/>
+      <pc:sldChg chg="modSp mod setBg">
+        <pc:chgData name="Le Jiayang" userId="72dc08ead7328938" providerId="LiveId" clId="{2E694533-A3D7-44F0-8378-4BF09FAADAF7}" dt="2026-03-16T11:50:25.262" v="174" actId="20577"/>
         <pc:sldMkLst>
           <pc:docMk/>
           <pc:sldMk cId="0" sldId="263"/>
         </pc:sldMkLst>
+        <pc:spChg chg="mod">
+          <ac:chgData name="Le Jiayang" userId="72dc08ead7328938" providerId="LiveId" clId="{2E694533-A3D7-44F0-8378-4BF09FAADAF7}" dt="2026-03-16T11:50:25.262" v="174" actId="20577"/>
+          <ac:spMkLst>
+            <pc:docMk/>
+            <pc:sldMk cId="0" sldId="263"/>
+            <ac:spMk id="14" creationId="{00000000-0000-0000-0000-000000000000}"/>
+          </ac:spMkLst>
+        </pc:spChg>
       </pc:sldChg>
       <pc:sldChg chg="setBg">
         <pc:chgData name="Le Jiayang" userId="72dc08ead7328938" providerId="LiveId" clId="{2E694533-A3D7-44F0-8378-4BF09FAADAF7}" dt="2026-03-13T10:57:37.500" v="5"/>
@@ -336,21 +371,6 @@
             <ac:spMk id="4" creationId="{00000000-0000-0000-0000-000000000000}"/>
           </ac:spMkLst>
         </pc:spChg>
-        <pc:graphicFrameChg chg="del modGraphic">
-          <ac:chgData name="Le Jiayang" userId="72dc08ead7328938" providerId="LiveId" clId="{2E694533-A3D7-44F0-8378-4BF09FAADAF7}" dt="2026-03-13T11:40:35.060" v="136" actId="478"/>
-          <ac:graphicFrameMkLst>
-            <pc:docMk/>
-            <pc:sldMk cId="0" sldId="265"/>
-            <ac:graphicFrameMk id="11" creationId="{00000000-0000-0000-0000-000000000000}"/>
-          </ac:graphicFrameMkLst>
-        </pc:graphicFrameChg>
-      </pc:sldChg>
-      <pc:sldChg chg="del setBg">
-        <pc:chgData name="Le Jiayang" userId="72dc08ead7328938" providerId="LiveId" clId="{2E694533-A3D7-44F0-8378-4BF09FAADAF7}" dt="2026-03-13T11:40:39.382" v="137" actId="2696"/>
-        <pc:sldMkLst>
-          <pc:docMk/>
-          <pc:sldMk cId="0" sldId="266"/>
-        </pc:sldMkLst>
       </pc:sldChg>
       <pc:sldChg chg="setBg">
         <pc:chgData name="Le Jiayang" userId="72dc08ead7328938" providerId="LiveId" clId="{2E694533-A3D7-44F0-8378-4BF09FAADAF7}" dt="2026-03-13T10:57:37.500" v="5"/>
@@ -364,141 +384,6 @@
         <pc:sldMkLst>
           <pc:docMk/>
           <pc:sldMk cId="0" sldId="268"/>
-        </pc:sldMkLst>
-        <pc:spChg chg="del">
-          <ac:chgData name="Le Jiayang" userId="72dc08ead7328938" providerId="LiveId" clId="{2E694533-A3D7-44F0-8378-4BF09FAADAF7}" dt="2026-03-13T11:40:04.924" v="125" actId="478"/>
-          <ac:spMkLst>
-            <pc:docMk/>
-            <pc:sldMk cId="0" sldId="268"/>
-            <ac:spMk id="6" creationId="{00000000-0000-0000-0000-000000000000}"/>
-          </ac:spMkLst>
-        </pc:spChg>
-        <pc:spChg chg="del">
-          <ac:chgData name="Le Jiayang" userId="72dc08ead7328938" providerId="LiveId" clId="{2E694533-A3D7-44F0-8378-4BF09FAADAF7}" dt="2026-03-13T11:40:04.924" v="125" actId="478"/>
-          <ac:spMkLst>
-            <pc:docMk/>
-            <pc:sldMk cId="0" sldId="268"/>
-            <ac:spMk id="7" creationId="{00000000-0000-0000-0000-000000000000}"/>
-          </ac:spMkLst>
-        </pc:spChg>
-        <pc:spChg chg="del">
-          <ac:chgData name="Le Jiayang" userId="72dc08ead7328938" providerId="LiveId" clId="{2E694533-A3D7-44F0-8378-4BF09FAADAF7}" dt="2026-03-13T11:40:04.924" v="125" actId="478"/>
-          <ac:spMkLst>
-            <pc:docMk/>
-            <pc:sldMk cId="0" sldId="268"/>
-            <ac:spMk id="8" creationId="{00000000-0000-0000-0000-000000000000}"/>
-          </ac:spMkLst>
-        </pc:spChg>
-        <pc:spChg chg="del">
-          <ac:chgData name="Le Jiayang" userId="72dc08ead7328938" providerId="LiveId" clId="{2E694533-A3D7-44F0-8378-4BF09FAADAF7}" dt="2026-03-13T11:40:04.924" v="125" actId="478"/>
-          <ac:spMkLst>
-            <pc:docMk/>
-            <pc:sldMk cId="0" sldId="268"/>
-            <ac:spMk id="9" creationId="{00000000-0000-0000-0000-000000000000}"/>
-          </ac:spMkLst>
-        </pc:spChg>
-        <pc:spChg chg="del">
-          <ac:chgData name="Le Jiayang" userId="72dc08ead7328938" providerId="LiveId" clId="{2E694533-A3D7-44F0-8378-4BF09FAADAF7}" dt="2026-03-13T11:40:07.995" v="126" actId="478"/>
-          <ac:spMkLst>
-            <pc:docMk/>
-            <pc:sldMk cId="0" sldId="268"/>
-            <ac:spMk id="10" creationId="{00000000-0000-0000-0000-000000000000}"/>
-          </ac:spMkLst>
-        </pc:spChg>
-        <pc:spChg chg="del">
-          <ac:chgData name="Le Jiayang" userId="72dc08ead7328938" providerId="LiveId" clId="{2E694533-A3D7-44F0-8378-4BF09FAADAF7}" dt="2026-03-13T11:40:04.924" v="125" actId="478"/>
-          <ac:spMkLst>
-            <pc:docMk/>
-            <pc:sldMk cId="0" sldId="268"/>
-            <ac:spMk id="11" creationId="{00000000-0000-0000-0000-000000000000}"/>
-          </ac:spMkLst>
-        </pc:spChg>
-        <pc:spChg chg="del">
-          <ac:chgData name="Le Jiayang" userId="72dc08ead7328938" providerId="LiveId" clId="{2E694533-A3D7-44F0-8378-4BF09FAADAF7}" dt="2026-03-13T11:40:10.139" v="127" actId="478"/>
-          <ac:spMkLst>
-            <pc:docMk/>
-            <pc:sldMk cId="0" sldId="268"/>
-            <ac:spMk id="12" creationId="{00000000-0000-0000-0000-000000000000}"/>
-          </ac:spMkLst>
-        </pc:spChg>
-        <pc:spChg chg="del">
-          <ac:chgData name="Le Jiayang" userId="72dc08ead7328938" providerId="LiveId" clId="{2E694533-A3D7-44F0-8378-4BF09FAADAF7}" dt="2026-03-13T11:40:04.924" v="125" actId="478"/>
-          <ac:spMkLst>
-            <pc:docMk/>
-            <pc:sldMk cId="0" sldId="268"/>
-            <ac:spMk id="13" creationId="{00000000-0000-0000-0000-000000000000}"/>
-          </ac:spMkLst>
-        </pc:spChg>
-        <pc:spChg chg="del">
-          <ac:chgData name="Le Jiayang" userId="72dc08ead7328938" providerId="LiveId" clId="{2E694533-A3D7-44F0-8378-4BF09FAADAF7}" dt="2026-03-13T11:40:17.584" v="132" actId="478"/>
-          <ac:spMkLst>
-            <pc:docMk/>
-            <pc:sldMk cId="0" sldId="268"/>
-            <ac:spMk id="14" creationId="{00000000-0000-0000-0000-000000000000}"/>
-          </ac:spMkLst>
-        </pc:spChg>
-        <pc:spChg chg="del">
-          <ac:chgData name="Le Jiayang" userId="72dc08ead7328938" providerId="LiveId" clId="{2E694533-A3D7-44F0-8378-4BF09FAADAF7}" dt="2026-03-13T11:40:10.139" v="127" actId="478"/>
-          <ac:spMkLst>
-            <pc:docMk/>
-            <pc:sldMk cId="0" sldId="268"/>
-            <ac:spMk id="15" creationId="{00000000-0000-0000-0000-000000000000}"/>
-          </ac:spMkLst>
-        </pc:spChg>
-        <pc:spChg chg="del">
-          <ac:chgData name="Le Jiayang" userId="72dc08ead7328938" providerId="LiveId" clId="{2E694533-A3D7-44F0-8378-4BF09FAADAF7}" dt="2026-03-13T11:40:04.924" v="125" actId="478"/>
-          <ac:spMkLst>
-            <pc:docMk/>
-            <pc:sldMk cId="0" sldId="268"/>
-            <ac:spMk id="16" creationId="{00000000-0000-0000-0000-000000000000}"/>
-          </ac:spMkLst>
-        </pc:spChg>
-        <pc:spChg chg="del mod">
-          <ac:chgData name="Le Jiayang" userId="72dc08ead7328938" providerId="LiveId" clId="{2E694533-A3D7-44F0-8378-4BF09FAADAF7}" dt="2026-03-13T11:40:15.812" v="131" actId="478"/>
-          <ac:spMkLst>
-            <pc:docMk/>
-            <pc:sldMk cId="0" sldId="268"/>
-            <ac:spMk id="17" creationId="{00000000-0000-0000-0000-000000000000}"/>
-          </ac:spMkLst>
-        </pc:spChg>
-        <pc:spChg chg="del">
-          <ac:chgData name="Le Jiayang" userId="72dc08ead7328938" providerId="LiveId" clId="{2E694533-A3D7-44F0-8378-4BF09FAADAF7}" dt="2026-03-13T11:40:10.139" v="127" actId="478"/>
-          <ac:spMkLst>
-            <pc:docMk/>
-            <pc:sldMk cId="0" sldId="268"/>
-            <ac:spMk id="18" creationId="{00000000-0000-0000-0000-000000000000}"/>
-          </ac:spMkLst>
-        </pc:spChg>
-        <pc:spChg chg="del">
-          <ac:chgData name="Le Jiayang" userId="72dc08ead7328938" providerId="LiveId" clId="{2E694533-A3D7-44F0-8378-4BF09FAADAF7}" dt="2026-03-13T11:40:04.924" v="125" actId="478"/>
-          <ac:spMkLst>
-            <pc:docMk/>
-            <pc:sldMk cId="0" sldId="268"/>
-            <ac:spMk id="19" creationId="{00000000-0000-0000-0000-000000000000}"/>
-          </ac:spMkLst>
-        </pc:spChg>
-        <pc:spChg chg="del mod">
-          <ac:chgData name="Le Jiayang" userId="72dc08ead7328938" providerId="LiveId" clId="{2E694533-A3D7-44F0-8378-4BF09FAADAF7}" dt="2026-03-13T11:40:14.078" v="129" actId="478"/>
-          <ac:spMkLst>
-            <pc:docMk/>
-            <pc:sldMk cId="0" sldId="268"/>
-            <ac:spMk id="20" creationId="{00000000-0000-0000-0000-000000000000}"/>
-          </ac:spMkLst>
-        </pc:spChg>
-        <pc:spChg chg="del">
-          <ac:chgData name="Le Jiayang" userId="72dc08ead7328938" providerId="LiveId" clId="{2E694533-A3D7-44F0-8378-4BF09FAADAF7}" dt="2026-03-13T11:40:10.139" v="127" actId="478"/>
-          <ac:spMkLst>
-            <pc:docMk/>
-            <pc:sldMk cId="0" sldId="268"/>
-            <ac:spMk id="21" creationId="{00000000-0000-0000-0000-000000000000}"/>
-          </ac:spMkLst>
-        </pc:spChg>
-      </pc:sldChg>
-      <pc:sldChg chg="del setBg">
-        <pc:chgData name="Le Jiayang" userId="72dc08ead7328938" providerId="LiveId" clId="{2E694533-A3D7-44F0-8378-4BF09FAADAF7}" dt="2026-03-13T11:40:21.568" v="133" actId="2696"/>
-        <pc:sldMkLst>
-          <pc:docMk/>
-          <pc:sldMk cId="0" sldId="269"/>
         </pc:sldMkLst>
       </pc:sldChg>
       <pc:sldChg chg="setBg">
@@ -595,7 +480,7 @@
               </a:defRPr>
             </a:pPr>
             <a:r>
-              <a:rPr lang="en-US" sz="1100" b="0" i="0" u="none" strike="noStrike">
+              <a:rPr lang="en-US" sz="1100" b="0" i="0" u="none" strike="noStrike" dirty="0">
                 <a:solidFill>
                   <a:srgbClr val="0F1F40"/>
                 </a:solidFill>
@@ -1175,6 +1060,13 @@
           </p:nvPr>
         </p:nvSpPr>
         <p:spPr/>
+        <p:txBody>
+          <a:bodyPr/>
+          <a:lstStyle/>
+          <a:p>
+            <a:endParaRPr lang="en-MY"/>
+          </a:p>
+        </p:txBody>
       </p:sp>
       <p:sp>
         <p:nvSpPr>
@@ -1214,7 +1106,7 @@
               <a:rPr lang="en-US"/>
               <a:t>1</a:t>
             </a:fld>
-            <a:endParaRPr lang="en-US"/>
+            <a:endParaRPr lang="en-US" dirty="0"/>
           </a:p>
         </p:txBody>
       </p:sp>
@@ -1259,6 +1151,13 @@
           </p:nvPr>
         </p:nvSpPr>
         <p:spPr/>
+        <p:txBody>
+          <a:bodyPr/>
+          <a:lstStyle/>
+          <a:p>
+            <a:endParaRPr lang="en-MY"/>
+          </a:p>
+        </p:txBody>
       </p:sp>
       <p:sp>
         <p:nvSpPr>
@@ -1298,7 +1197,7 @@
               <a:rPr lang="en-US"/>
               <a:t>10</a:t>
             </a:fld>
-            <a:endParaRPr lang="en-US"/>
+            <a:endParaRPr lang="en-US" dirty="0"/>
           </a:p>
         </p:txBody>
       </p:sp>
@@ -1343,6 +1242,13 @@
           </p:nvPr>
         </p:nvSpPr>
         <p:spPr/>
+        <p:txBody>
+          <a:bodyPr/>
+          <a:lstStyle/>
+          <a:p>
+            <a:endParaRPr lang="en-MY"/>
+          </a:p>
+        </p:txBody>
       </p:sp>
       <p:sp>
         <p:nvSpPr>
@@ -1382,7 +1288,7 @@
               <a:rPr lang="en-US"/>
               <a:t>11</a:t>
             </a:fld>
-            <a:endParaRPr lang="en-US"/>
+            <a:endParaRPr lang="en-US" dirty="0"/>
           </a:p>
         </p:txBody>
       </p:sp>
@@ -1427,6 +1333,13 @@
           </p:nvPr>
         </p:nvSpPr>
         <p:spPr/>
+        <p:txBody>
+          <a:bodyPr/>
+          <a:lstStyle/>
+          <a:p>
+            <a:endParaRPr lang="en-MY"/>
+          </a:p>
+        </p:txBody>
       </p:sp>
       <p:sp>
         <p:nvSpPr>
@@ -1466,7 +1379,7 @@
               <a:rPr lang="en-US"/>
               <a:t>12</a:t>
             </a:fld>
-            <a:endParaRPr lang="en-US"/>
+            <a:endParaRPr lang="en-US" dirty="0"/>
           </a:p>
         </p:txBody>
       </p:sp>
@@ -1511,6 +1424,13 @@
           </p:nvPr>
         </p:nvSpPr>
         <p:spPr/>
+        <p:txBody>
+          <a:bodyPr/>
+          <a:lstStyle/>
+          <a:p>
+            <a:endParaRPr lang="en-MY"/>
+          </a:p>
+        </p:txBody>
       </p:sp>
       <p:sp>
         <p:nvSpPr>
@@ -1550,7 +1470,7 @@
               <a:rPr lang="en-US"/>
               <a:t>13</a:t>
             </a:fld>
-            <a:endParaRPr lang="en-US"/>
+            <a:endParaRPr lang="en-US" dirty="0"/>
           </a:p>
         </p:txBody>
       </p:sp>
@@ -1595,6 +1515,13 @@
           </p:nvPr>
         </p:nvSpPr>
         <p:spPr/>
+        <p:txBody>
+          <a:bodyPr/>
+          <a:lstStyle/>
+          <a:p>
+            <a:endParaRPr lang="en-MY"/>
+          </a:p>
+        </p:txBody>
       </p:sp>
       <p:sp>
         <p:nvSpPr>
@@ -1634,7 +1561,7 @@
               <a:rPr lang="en-US"/>
               <a:t>14</a:t>
             </a:fld>
-            <a:endParaRPr lang="en-US"/>
+            <a:endParaRPr lang="en-US" dirty="0"/>
           </a:p>
         </p:txBody>
       </p:sp>
@@ -1679,6 +1606,13 @@
           </p:nvPr>
         </p:nvSpPr>
         <p:spPr/>
+        <p:txBody>
+          <a:bodyPr/>
+          <a:lstStyle/>
+          <a:p>
+            <a:endParaRPr lang="en-MY"/>
+          </a:p>
+        </p:txBody>
       </p:sp>
       <p:sp>
         <p:nvSpPr>
@@ -1718,7 +1652,7 @@
               <a:rPr lang="en-US"/>
               <a:t>15</a:t>
             </a:fld>
-            <a:endParaRPr lang="en-US"/>
+            <a:endParaRPr lang="en-US" dirty="0"/>
           </a:p>
         </p:txBody>
       </p:sp>
@@ -1763,6 +1697,13 @@
           </p:nvPr>
         </p:nvSpPr>
         <p:spPr/>
+        <p:txBody>
+          <a:bodyPr/>
+          <a:lstStyle/>
+          <a:p>
+            <a:endParaRPr lang="en-MY"/>
+          </a:p>
+        </p:txBody>
       </p:sp>
       <p:sp>
         <p:nvSpPr>
@@ -1802,7 +1743,7 @@
               <a:rPr lang="en-US"/>
               <a:t>16</a:t>
             </a:fld>
-            <a:endParaRPr lang="en-US"/>
+            <a:endParaRPr lang="en-US" dirty="0"/>
           </a:p>
         </p:txBody>
       </p:sp>
@@ -1847,6 +1788,13 @@
           </p:nvPr>
         </p:nvSpPr>
         <p:spPr/>
+        <p:txBody>
+          <a:bodyPr/>
+          <a:lstStyle/>
+          <a:p>
+            <a:endParaRPr lang="en-MY"/>
+          </a:p>
+        </p:txBody>
       </p:sp>
       <p:sp>
         <p:nvSpPr>
@@ -1886,7 +1834,7 @@
               <a:rPr lang="en-US"/>
               <a:t>2</a:t>
             </a:fld>
-            <a:endParaRPr lang="en-US"/>
+            <a:endParaRPr lang="en-US" dirty="0"/>
           </a:p>
         </p:txBody>
       </p:sp>
@@ -1931,6 +1879,13 @@
           </p:nvPr>
         </p:nvSpPr>
         <p:spPr/>
+        <p:txBody>
+          <a:bodyPr/>
+          <a:lstStyle/>
+          <a:p>
+            <a:endParaRPr lang="en-MY"/>
+          </a:p>
+        </p:txBody>
       </p:sp>
       <p:sp>
         <p:nvSpPr>
@@ -1970,7 +1925,7 @@
               <a:rPr lang="en-US"/>
               <a:t>3</a:t>
             </a:fld>
-            <a:endParaRPr lang="en-US"/>
+            <a:endParaRPr lang="en-US" dirty="0"/>
           </a:p>
         </p:txBody>
       </p:sp>
@@ -2015,6 +1970,13 @@
           </p:nvPr>
         </p:nvSpPr>
         <p:spPr/>
+        <p:txBody>
+          <a:bodyPr/>
+          <a:lstStyle/>
+          <a:p>
+            <a:endParaRPr lang="en-MY"/>
+          </a:p>
+        </p:txBody>
       </p:sp>
       <p:sp>
         <p:nvSpPr>
@@ -2054,7 +2016,7 @@
               <a:rPr lang="en-US"/>
               <a:t>4</a:t>
             </a:fld>
-            <a:endParaRPr lang="en-US"/>
+            <a:endParaRPr lang="en-US" dirty="0"/>
           </a:p>
         </p:txBody>
       </p:sp>
@@ -2099,6 +2061,13 @@
           </p:nvPr>
         </p:nvSpPr>
         <p:spPr/>
+        <p:txBody>
+          <a:bodyPr/>
+          <a:lstStyle/>
+          <a:p>
+            <a:endParaRPr lang="en-MY"/>
+          </a:p>
+        </p:txBody>
       </p:sp>
       <p:sp>
         <p:nvSpPr>
@@ -2138,7 +2107,7 @@
               <a:rPr lang="en-US"/>
               <a:t>5</a:t>
             </a:fld>
-            <a:endParaRPr lang="en-US"/>
+            <a:endParaRPr lang="en-US" dirty="0"/>
           </a:p>
         </p:txBody>
       </p:sp>
@@ -2183,6 +2152,13 @@
           </p:nvPr>
         </p:nvSpPr>
         <p:spPr/>
+        <p:txBody>
+          <a:bodyPr/>
+          <a:lstStyle/>
+          <a:p>
+            <a:endParaRPr lang="en-MY"/>
+          </a:p>
+        </p:txBody>
       </p:sp>
       <p:sp>
         <p:nvSpPr>
@@ -2222,7 +2198,7 @@
               <a:rPr lang="en-US"/>
               <a:t>6</a:t>
             </a:fld>
-            <a:endParaRPr lang="en-US"/>
+            <a:endParaRPr lang="en-US" dirty="0"/>
           </a:p>
         </p:txBody>
       </p:sp>
@@ -2267,6 +2243,13 @@
           </p:nvPr>
         </p:nvSpPr>
         <p:spPr/>
+        <p:txBody>
+          <a:bodyPr/>
+          <a:lstStyle/>
+          <a:p>
+            <a:endParaRPr lang="en-MY"/>
+          </a:p>
+        </p:txBody>
       </p:sp>
       <p:sp>
         <p:nvSpPr>
@@ -2306,7 +2289,7 @@
               <a:rPr lang="en-US"/>
               <a:t>7</a:t>
             </a:fld>
-            <a:endParaRPr lang="en-US"/>
+            <a:endParaRPr lang="en-US" dirty="0"/>
           </a:p>
         </p:txBody>
       </p:sp>
@@ -2351,6 +2334,13 @@
           </p:nvPr>
         </p:nvSpPr>
         <p:spPr/>
+        <p:txBody>
+          <a:bodyPr/>
+          <a:lstStyle/>
+          <a:p>
+            <a:endParaRPr lang="en-MY"/>
+          </a:p>
+        </p:txBody>
       </p:sp>
       <p:sp>
         <p:nvSpPr>
@@ -2390,7 +2380,7 @@
               <a:rPr lang="en-US"/>
               <a:t>8</a:t>
             </a:fld>
-            <a:endParaRPr lang="en-US"/>
+            <a:endParaRPr lang="en-US" dirty="0"/>
           </a:p>
         </p:txBody>
       </p:sp>
@@ -2435,6 +2425,13 @@
           </p:nvPr>
         </p:nvSpPr>
         <p:spPr/>
+        <p:txBody>
+          <a:bodyPr/>
+          <a:lstStyle/>
+          <a:p>
+            <a:endParaRPr lang="en-MY"/>
+          </a:p>
+        </p:txBody>
       </p:sp>
       <p:sp>
         <p:nvSpPr>
@@ -2474,7 +2471,7 @@
               <a:rPr lang="en-US"/>
               <a:t>9</a:t>
             </a:fld>
-            <a:endParaRPr lang="en-US"/>
+            <a:endParaRPr lang="en-US" dirty="0"/>
           </a:p>
         </p:txBody>
       </p:sp>
@@ -2852,6 +2849,13 @@
             <a:prstDash val="solid"/>
           </a:ln>
         </p:spPr>
+        <p:txBody>
+          <a:bodyPr/>
+          <a:lstStyle/>
+          <a:p>
+            <a:endParaRPr lang="en-MY"/>
+          </a:p>
+        </p:txBody>
       </p:sp>
       <p:sp>
         <p:nvSpPr>
@@ -2877,6 +2881,13 @@
             <a:prstDash val="solid"/>
           </a:ln>
         </p:spPr>
+        <p:txBody>
+          <a:bodyPr/>
+          <a:lstStyle/>
+          <a:p>
+            <a:endParaRPr lang="en-MY"/>
+          </a:p>
+        </p:txBody>
       </p:sp>
       <p:sp>
         <p:nvSpPr>
@@ -2959,6 +2970,13 @@
             <a:prstDash val="solid"/>
           </a:ln>
         </p:spPr>
+        <p:txBody>
+          <a:bodyPr/>
+          <a:lstStyle/>
+          <a:p>
+            <a:endParaRPr lang="en-MY"/>
+          </a:p>
+        </p:txBody>
       </p:sp>
       <p:sp>
         <p:nvSpPr>
@@ -3032,29 +3050,7 @@
                 <a:ea typeface="Calibri" pitchFamily="34" charset="-122"/>
                 <a:cs typeface="Calibri" pitchFamily="34" charset="-120"/>
               </a:rPr>
-              <a:t>Jia Yang Le  ·  Azis </a:t>
-            </a:r>
-            <a:r>
-              <a:rPr lang="en-US" sz="1400" dirty="0" err="1">
-                <a:solidFill>
-                  <a:srgbClr val="9EAFC2"/>
-                </a:solidFill>
-                <a:latin typeface="Calibri" pitchFamily="34" charset="0"/>
-                <a:ea typeface="Calibri" pitchFamily="34" charset="-122"/>
-                <a:cs typeface="Calibri" pitchFamily="34" charset="-120"/>
-              </a:rPr>
-              <a:t>Maaraij</a:t>
-            </a:r>
-            <a:r>
-              <a:rPr lang="en-US" sz="1400" dirty="0">
-                <a:solidFill>
-                  <a:srgbClr val="9EAFC2"/>
-                </a:solidFill>
-                <a:latin typeface="Calibri" pitchFamily="34" charset="0"/>
-                <a:ea typeface="Calibri" pitchFamily="34" charset="-122"/>
-                <a:cs typeface="Calibri" pitchFamily="34" charset="-120"/>
-              </a:rPr>
-              <a:t> Jamil  ·  Komila Askarova</a:t>
+              <a:t>Jia Yang Le  ·  Azis Maaraij Jamil  ·  Komila Askarova</a:t>
             </a:r>
             <a:endParaRPr lang="en-US" sz="1400" dirty="0"/>
           </a:p>
@@ -3156,6 +3152,13 @@
             <a:prstDash val="solid"/>
           </a:ln>
         </p:spPr>
+        <p:txBody>
+          <a:bodyPr/>
+          <a:lstStyle/>
+          <a:p>
+            <a:endParaRPr lang="en-MY"/>
+          </a:p>
+        </p:txBody>
       </p:sp>
       <p:sp>
         <p:nvSpPr>
@@ -3250,6 +3253,13 @@
             <a:prstDash val="solid"/>
           </a:ln>
         </p:spPr>
+        <p:txBody>
+          <a:bodyPr/>
+          <a:lstStyle/>
+          <a:p>
+            <a:endParaRPr lang="en-MY"/>
+          </a:p>
+        </p:txBody>
       </p:sp>
     </p:spTree>
   </p:cSld>
@@ -3308,6 +3318,13 @@
             <a:prstDash val="solid"/>
           </a:ln>
         </p:spPr>
+        <p:txBody>
+          <a:bodyPr/>
+          <a:lstStyle/>
+          <a:p>
+            <a:endParaRPr lang="en-MY"/>
+          </a:p>
+        </p:txBody>
       </p:sp>
       <p:sp>
         <p:nvSpPr>
@@ -3333,6 +3350,13 @@
             <a:prstDash val="solid"/>
           </a:ln>
         </p:spPr>
+        <p:txBody>
+          <a:bodyPr/>
+          <a:lstStyle/>
+          <a:p>
+            <a:endParaRPr lang="en-MY"/>
+          </a:p>
+        </p:txBody>
       </p:sp>
       <p:sp>
         <p:nvSpPr>
@@ -3436,6 +3460,13 @@
             <a:prstDash val="solid"/>
           </a:ln>
         </p:spPr>
+        <p:txBody>
+          <a:bodyPr/>
+          <a:lstStyle/>
+          <a:p>
+            <a:endParaRPr lang="en-MY"/>
+          </a:p>
+        </p:txBody>
       </p:sp>
       <p:sp>
         <p:nvSpPr>
@@ -3572,6 +3603,13 @@
             <a:prstDash val="solid"/>
           </a:ln>
         </p:spPr>
+        <p:txBody>
+          <a:bodyPr/>
+          <a:lstStyle/>
+          <a:p>
+            <a:endParaRPr lang="en-MY"/>
+          </a:p>
+        </p:txBody>
       </p:sp>
       <p:sp>
         <p:nvSpPr>
@@ -3677,6 +3715,13 @@
             <a:prstDash val="solid"/>
           </a:ln>
         </p:spPr>
+        <p:txBody>
+          <a:bodyPr/>
+          <a:lstStyle/>
+          <a:p>
+            <a:endParaRPr lang="en-MY"/>
+          </a:p>
+        </p:txBody>
       </p:sp>
     </p:spTree>
   </p:cSld>
@@ -3735,6 +3780,13 @@
             <a:prstDash val="solid"/>
           </a:ln>
         </p:spPr>
+        <p:txBody>
+          <a:bodyPr/>
+          <a:lstStyle/>
+          <a:p>
+            <a:endParaRPr lang="en-MY"/>
+          </a:p>
+        </p:txBody>
       </p:sp>
       <p:sp>
         <p:nvSpPr>
@@ -3799,6 +3851,13 @@
             <a:prstDash val="solid"/>
           </a:ln>
         </p:spPr>
+        <p:txBody>
+          <a:bodyPr/>
+          <a:lstStyle/>
+          <a:p>
+            <a:endParaRPr lang="en-MY"/>
+          </a:p>
+        </p:txBody>
       </p:sp>
       <p:sp>
         <p:nvSpPr>
@@ -3824,6 +3883,13 @@
             <a:prstDash val="solid"/>
           </a:ln>
         </p:spPr>
+        <p:txBody>
+          <a:bodyPr/>
+          <a:lstStyle/>
+          <a:p>
+            <a:endParaRPr lang="en-MY"/>
+          </a:p>
+        </p:txBody>
       </p:sp>
       <p:sp>
         <p:nvSpPr>
@@ -3849,6 +3915,13 @@
             <a:prstDash val="solid"/>
           </a:ln>
         </p:spPr>
+        <p:txBody>
+          <a:bodyPr/>
+          <a:lstStyle/>
+          <a:p>
+            <a:endParaRPr lang="en-MY"/>
+          </a:p>
+        </p:txBody>
       </p:sp>
       <p:sp>
         <p:nvSpPr>
@@ -3952,6 +4025,13 @@
             <a:prstDash val="solid"/>
           </a:ln>
         </p:spPr>
+        <p:txBody>
+          <a:bodyPr/>
+          <a:lstStyle/>
+          <a:p>
+            <a:endParaRPr lang="en-MY"/>
+          </a:p>
+        </p:txBody>
       </p:sp>
       <p:sp>
         <p:nvSpPr>
@@ -3977,6 +4057,13 @@
             <a:prstDash val="solid"/>
           </a:ln>
         </p:spPr>
+        <p:txBody>
+          <a:bodyPr/>
+          <a:lstStyle/>
+          <a:p>
+            <a:endParaRPr lang="en-MY"/>
+          </a:p>
+        </p:txBody>
       </p:sp>
       <p:sp>
         <p:nvSpPr>
@@ -4002,6 +4089,13 @@
             <a:prstDash val="solid"/>
           </a:ln>
         </p:spPr>
+        <p:txBody>
+          <a:bodyPr/>
+          <a:lstStyle/>
+          <a:p>
+            <a:endParaRPr lang="en-MY"/>
+          </a:p>
+        </p:txBody>
       </p:sp>
       <p:sp>
         <p:nvSpPr>
@@ -4105,6 +4199,13 @@
             <a:prstDash val="solid"/>
           </a:ln>
         </p:spPr>
+        <p:txBody>
+          <a:bodyPr/>
+          <a:lstStyle/>
+          <a:p>
+            <a:endParaRPr lang="en-MY"/>
+          </a:p>
+        </p:txBody>
       </p:sp>
       <p:sp>
         <p:nvSpPr>
@@ -4130,6 +4231,13 @@
             <a:prstDash val="solid"/>
           </a:ln>
         </p:spPr>
+        <p:txBody>
+          <a:bodyPr/>
+          <a:lstStyle/>
+          <a:p>
+            <a:endParaRPr lang="en-MY"/>
+          </a:p>
+        </p:txBody>
       </p:sp>
       <p:sp>
         <p:nvSpPr>
@@ -4155,6 +4263,13 @@
             <a:prstDash val="solid"/>
           </a:ln>
         </p:spPr>
+        <p:txBody>
+          <a:bodyPr/>
+          <a:lstStyle/>
+          <a:p>
+            <a:endParaRPr lang="en-MY"/>
+          </a:p>
+        </p:txBody>
       </p:sp>
       <p:sp>
         <p:nvSpPr>
@@ -4258,6 +4373,13 @@
             <a:prstDash val="solid"/>
           </a:ln>
         </p:spPr>
+        <p:txBody>
+          <a:bodyPr/>
+          <a:lstStyle/>
+          <a:p>
+            <a:endParaRPr lang="en-MY"/>
+          </a:p>
+        </p:txBody>
       </p:sp>
       <p:sp>
         <p:nvSpPr>
@@ -4283,6 +4405,13 @@
             <a:prstDash val="solid"/>
           </a:ln>
         </p:spPr>
+        <p:txBody>
+          <a:bodyPr/>
+          <a:lstStyle/>
+          <a:p>
+            <a:endParaRPr lang="en-MY"/>
+          </a:p>
+        </p:txBody>
       </p:sp>
       <p:sp>
         <p:nvSpPr>
@@ -4308,6 +4437,13 @@
             <a:prstDash val="solid"/>
           </a:ln>
         </p:spPr>
+        <p:txBody>
+          <a:bodyPr/>
+          <a:lstStyle/>
+          <a:p>
+            <a:endParaRPr lang="en-MY"/>
+          </a:p>
+        </p:txBody>
       </p:sp>
       <p:sp>
         <p:nvSpPr>
@@ -4411,6 +4547,13 @@
             <a:prstDash val="solid"/>
           </a:ln>
         </p:spPr>
+        <p:txBody>
+          <a:bodyPr/>
+          <a:lstStyle/>
+          <a:p>
+            <a:endParaRPr lang="en-MY"/>
+          </a:p>
+        </p:txBody>
       </p:sp>
       <p:sp>
         <p:nvSpPr>
@@ -4436,6 +4579,13 @@
             <a:prstDash val="solid"/>
           </a:ln>
         </p:spPr>
+        <p:txBody>
+          <a:bodyPr/>
+          <a:lstStyle/>
+          <a:p>
+            <a:endParaRPr lang="en-MY"/>
+          </a:p>
+        </p:txBody>
       </p:sp>
       <p:sp>
         <p:nvSpPr>
@@ -4461,6 +4611,13 @@
             <a:prstDash val="solid"/>
           </a:ln>
         </p:spPr>
+        <p:txBody>
+          <a:bodyPr/>
+          <a:lstStyle/>
+          <a:p>
+            <a:endParaRPr lang="en-MY"/>
+          </a:p>
+        </p:txBody>
       </p:sp>
       <p:sp>
         <p:nvSpPr>
@@ -4597,6 +4754,13 @@
             <a:prstDash val="solid"/>
           </a:ln>
         </p:spPr>
+        <p:txBody>
+          <a:bodyPr/>
+          <a:lstStyle/>
+          <a:p>
+            <a:endParaRPr lang="en-MY"/>
+          </a:p>
+        </p:txBody>
       </p:sp>
       <p:sp>
         <p:nvSpPr>
@@ -4702,6 +4866,13 @@
             <a:prstDash val="solid"/>
           </a:ln>
         </p:spPr>
+        <p:txBody>
+          <a:bodyPr/>
+          <a:lstStyle/>
+          <a:p>
+            <a:endParaRPr lang="en-MY"/>
+          </a:p>
+        </p:txBody>
       </p:sp>
       <p:sp>
         <p:nvSpPr>
@@ -4734,6 +4905,13 @@
             </a:outerShdw>
           </a:effectLst>
         </p:spPr>
+        <p:txBody>
+          <a:bodyPr/>
+          <a:lstStyle/>
+          <a:p>
+            <a:endParaRPr lang="en-MY"/>
+          </a:p>
+        </p:txBody>
       </p:sp>
       <p:sp>
         <p:nvSpPr>
@@ -4759,6 +4937,13 @@
             <a:prstDash val="solid"/>
           </a:ln>
         </p:spPr>
+        <p:txBody>
+          <a:bodyPr/>
+          <a:lstStyle/>
+          <a:p>
+            <a:endParaRPr lang="en-MY"/>
+          </a:p>
+        </p:txBody>
       </p:sp>
       <p:sp>
         <p:nvSpPr>
@@ -4957,6 +5142,13 @@
             </a:outerShdw>
           </a:effectLst>
         </p:spPr>
+        <p:txBody>
+          <a:bodyPr/>
+          <a:lstStyle/>
+          <a:p>
+            <a:endParaRPr lang="en-MY"/>
+          </a:p>
+        </p:txBody>
       </p:sp>
       <p:sp>
         <p:nvSpPr>
@@ -4982,6 +5174,13 @@
             <a:prstDash val="solid"/>
           </a:ln>
         </p:spPr>
+        <p:txBody>
+          <a:bodyPr/>
+          <a:lstStyle/>
+          <a:p>
+            <a:endParaRPr lang="en-MY"/>
+          </a:p>
+        </p:txBody>
       </p:sp>
       <p:sp>
         <p:nvSpPr>
@@ -5206,6 +5405,13 @@
             <a:prstDash val="solid"/>
           </a:ln>
         </p:spPr>
+        <p:txBody>
+          <a:bodyPr/>
+          <a:lstStyle/>
+          <a:p>
+            <a:endParaRPr lang="en-MY"/>
+          </a:p>
+        </p:txBody>
       </p:sp>
       <p:sp>
         <p:nvSpPr>
@@ -5311,6 +5517,13 @@
             <a:prstDash val="solid"/>
           </a:ln>
         </p:spPr>
+        <p:txBody>
+          <a:bodyPr/>
+          <a:lstStyle/>
+          <a:p>
+            <a:endParaRPr lang="en-MY"/>
+          </a:p>
+        </p:txBody>
       </p:sp>
       <p:sp>
         <p:nvSpPr>
@@ -5343,6 +5556,13 @@
             </a:outerShdw>
           </a:effectLst>
         </p:spPr>
+        <p:txBody>
+          <a:bodyPr/>
+          <a:lstStyle/>
+          <a:p>
+            <a:endParaRPr lang="en-MY"/>
+          </a:p>
+        </p:txBody>
       </p:sp>
       <p:sp>
         <p:nvSpPr>
@@ -5609,6 +5829,13 @@
             </a:outerShdw>
           </a:effectLst>
         </p:spPr>
+        <p:txBody>
+          <a:bodyPr/>
+          <a:lstStyle/>
+          <a:p>
+            <a:endParaRPr lang="en-MY"/>
+          </a:p>
+        </p:txBody>
       </p:sp>
       <p:sp>
         <p:nvSpPr>
@@ -5634,6 +5861,13 @@
             <a:prstDash val="solid"/>
           </a:ln>
         </p:spPr>
+        <p:txBody>
+          <a:bodyPr/>
+          <a:lstStyle/>
+          <a:p>
+            <a:endParaRPr lang="en-MY"/>
+          </a:p>
+        </p:txBody>
       </p:sp>
       <p:sp>
         <p:nvSpPr>
@@ -5698,6 +5932,13 @@
             <a:prstDash val="solid"/>
           </a:ln>
         </p:spPr>
+        <p:txBody>
+          <a:bodyPr/>
+          <a:lstStyle/>
+          <a:p>
+            <a:endParaRPr lang="en-MY"/>
+          </a:p>
+        </p:txBody>
       </p:sp>
       <p:sp>
         <p:nvSpPr>
@@ -5801,6 +6042,13 @@
             <a:prstDash val="solid"/>
           </a:ln>
         </p:spPr>
+        <p:txBody>
+          <a:bodyPr/>
+          <a:lstStyle/>
+          <a:p>
+            <a:endParaRPr lang="en-MY"/>
+          </a:p>
+        </p:txBody>
       </p:sp>
       <p:sp>
         <p:nvSpPr>
@@ -5904,6 +6152,13 @@
             <a:prstDash val="solid"/>
           </a:ln>
         </p:spPr>
+        <p:txBody>
+          <a:bodyPr/>
+          <a:lstStyle/>
+          <a:p>
+            <a:endParaRPr lang="en-MY"/>
+          </a:p>
+        </p:txBody>
       </p:sp>
       <p:sp>
         <p:nvSpPr>
@@ -6007,6 +6262,13 @@
             <a:prstDash val="solid"/>
           </a:ln>
         </p:spPr>
+        <p:txBody>
+          <a:bodyPr/>
+          <a:lstStyle/>
+          <a:p>
+            <a:endParaRPr lang="en-MY"/>
+          </a:p>
+        </p:txBody>
       </p:sp>
       <p:sp>
         <p:nvSpPr>
@@ -6104,6 +6366,13 @@
             <a:prstDash val="solid"/>
           </a:ln>
         </p:spPr>
+        <p:txBody>
+          <a:bodyPr/>
+          <a:lstStyle/>
+          <a:p>
+            <a:endParaRPr lang="en-MY"/>
+          </a:p>
+        </p:txBody>
       </p:sp>
       <p:sp>
         <p:nvSpPr>
@@ -6129,6 +6398,13 @@
             <a:prstDash val="solid"/>
           </a:ln>
         </p:spPr>
+        <p:txBody>
+          <a:bodyPr/>
+          <a:lstStyle/>
+          <a:p>
+            <a:endParaRPr lang="en-MY"/>
+          </a:p>
+        </p:txBody>
       </p:sp>
       <p:sp>
         <p:nvSpPr>
@@ -6232,6 +6508,13 @@
             <a:prstDash val="solid"/>
           </a:ln>
         </p:spPr>
+        <p:txBody>
+          <a:bodyPr/>
+          <a:lstStyle/>
+          <a:p>
+            <a:endParaRPr lang="en-MY"/>
+          </a:p>
+        </p:txBody>
       </p:sp>
       <p:sp>
         <p:nvSpPr>
@@ -6296,6 +6579,13 @@
             <a:prstDash val="solid"/>
           </a:ln>
         </p:spPr>
+        <p:txBody>
+          <a:bodyPr/>
+          <a:lstStyle/>
+          <a:p>
+            <a:endParaRPr lang="en-MY"/>
+          </a:p>
+        </p:txBody>
       </p:sp>
       <p:sp>
         <p:nvSpPr>
@@ -6430,6 +6720,13 @@
             <a:prstDash val="solid"/>
           </a:ln>
         </p:spPr>
+        <p:txBody>
+          <a:bodyPr/>
+          <a:lstStyle/>
+          <a:p>
+            <a:endParaRPr lang="en-MY"/>
+          </a:p>
+        </p:txBody>
       </p:sp>
       <p:sp>
         <p:nvSpPr>
@@ -6501,6 +6798,13 @@
             </a:outerShdw>
           </a:effectLst>
         </p:spPr>
+        <p:txBody>
+          <a:bodyPr/>
+          <a:lstStyle/>
+          <a:p>
+            <a:endParaRPr lang="en-MY"/>
+          </a:p>
+        </p:txBody>
       </p:sp>
       <p:sp>
         <p:nvSpPr>
@@ -6526,6 +6830,13 @@
             <a:prstDash val="solid"/>
           </a:ln>
         </p:spPr>
+        <p:txBody>
+          <a:bodyPr/>
+          <a:lstStyle/>
+          <a:p>
+            <a:endParaRPr lang="en-MY"/>
+          </a:p>
+        </p:txBody>
       </p:sp>
       <p:sp>
         <p:nvSpPr>
@@ -6692,6 +7003,13 @@
             </a:outerShdw>
           </a:effectLst>
         </p:spPr>
+        <p:txBody>
+          <a:bodyPr/>
+          <a:lstStyle/>
+          <a:p>
+            <a:endParaRPr lang="en-MY"/>
+          </a:p>
+        </p:txBody>
       </p:sp>
       <p:sp>
         <p:nvSpPr>
@@ -6717,6 +7035,13 @@
             <a:prstDash val="solid"/>
           </a:ln>
         </p:spPr>
+        <p:txBody>
+          <a:bodyPr/>
+          <a:lstStyle/>
+          <a:p>
+            <a:endParaRPr lang="en-MY"/>
+          </a:p>
+        </p:txBody>
       </p:sp>
       <p:sp>
         <p:nvSpPr>
@@ -6829,29 +7154,7 @@
                 <a:ea typeface="Calibri" pitchFamily="34" charset="-122"/>
                 <a:cs typeface="Calibri" pitchFamily="34" charset="-120"/>
               </a:rPr>
-              <a:t>Azis </a:t>
-            </a:r>
-            <a:r>
-              <a:rPr lang="en-US" sz="1100" i="1" dirty="0" err="1">
-                <a:solidFill>
-                  <a:srgbClr val="0D9488"/>
-                </a:solidFill>
-                <a:latin typeface="Calibri" pitchFamily="34" charset="0"/>
-                <a:ea typeface="Calibri" pitchFamily="34" charset="-122"/>
-                <a:cs typeface="Calibri" pitchFamily="34" charset="-120"/>
-              </a:rPr>
-              <a:t>Maaraij</a:t>
-            </a:r>
-            <a:r>
-              <a:rPr lang="en-US" sz="1100" i="1" dirty="0">
-                <a:solidFill>
-                  <a:srgbClr val="0D9488"/>
-                </a:solidFill>
-                <a:latin typeface="Calibri" pitchFamily="34" charset="0"/>
-                <a:ea typeface="Calibri" pitchFamily="34" charset="-122"/>
-                <a:cs typeface="Calibri" pitchFamily="34" charset="-120"/>
-              </a:rPr>
-              <a:t> Jamil </a:t>
+              <a:t>Azis Maaraij Jamil </a:t>
             </a:r>
             <a:endParaRPr lang="en-US" sz="1100" dirty="0"/>
           </a:p>
@@ -6888,6 +7191,13 @@
             </a:outerShdw>
           </a:effectLst>
         </p:spPr>
+        <p:txBody>
+          <a:bodyPr/>
+          <a:lstStyle/>
+          <a:p>
+            <a:endParaRPr lang="en-MY"/>
+          </a:p>
+        </p:txBody>
       </p:sp>
       <p:sp>
         <p:nvSpPr>
@@ -6913,6 +7223,13 @@
             <a:prstDash val="solid"/>
           </a:ln>
         </p:spPr>
+        <p:txBody>
+          <a:bodyPr/>
+          <a:lstStyle/>
+          <a:p>
+            <a:endParaRPr lang="en-MY"/>
+          </a:p>
+        </p:txBody>
       </p:sp>
       <p:sp>
         <p:nvSpPr>
@@ -7079,6 +7396,13 @@
             </a:outerShdw>
           </a:effectLst>
         </p:spPr>
+        <p:txBody>
+          <a:bodyPr/>
+          <a:lstStyle/>
+          <a:p>
+            <a:endParaRPr lang="en-MY"/>
+          </a:p>
+        </p:txBody>
       </p:sp>
       <p:sp>
         <p:nvSpPr>
@@ -7104,6 +7428,13 @@
             <a:prstDash val="solid"/>
           </a:ln>
         </p:spPr>
+        <p:txBody>
+          <a:bodyPr/>
+          <a:lstStyle/>
+          <a:p>
+            <a:endParaRPr lang="en-MY"/>
+          </a:p>
+        </p:txBody>
       </p:sp>
       <p:sp>
         <p:nvSpPr>
@@ -7296,6 +7627,13 @@
             <a:prstDash val="solid"/>
           </a:ln>
         </p:spPr>
+        <p:txBody>
+          <a:bodyPr/>
+          <a:lstStyle/>
+          <a:p>
+            <a:endParaRPr lang="en-MY"/>
+          </a:p>
+        </p:txBody>
       </p:sp>
       <p:sp>
         <p:nvSpPr>
@@ -7401,6 +7739,13 @@
             <a:prstDash val="solid"/>
           </a:ln>
         </p:spPr>
+        <p:txBody>
+          <a:bodyPr/>
+          <a:lstStyle/>
+          <a:p>
+            <a:endParaRPr lang="en-MY"/>
+          </a:p>
+        </p:txBody>
       </p:sp>
       <p:sp>
         <p:nvSpPr>
@@ -7433,6 +7778,13 @@
             </a:outerShdw>
           </a:effectLst>
         </p:spPr>
+        <p:txBody>
+          <a:bodyPr/>
+          <a:lstStyle/>
+          <a:p>
+            <a:endParaRPr lang="en-MY"/>
+          </a:p>
+        </p:txBody>
       </p:sp>
       <p:sp>
         <p:nvSpPr>
@@ -7458,6 +7810,13 @@
             <a:prstDash val="solid"/>
           </a:ln>
         </p:spPr>
+        <p:txBody>
+          <a:bodyPr/>
+          <a:lstStyle/>
+          <a:p>
+            <a:endParaRPr lang="en-MY"/>
+          </a:p>
+        </p:txBody>
       </p:sp>
       <p:sp>
         <p:nvSpPr>
@@ -7656,6 +8015,13 @@
             </a:outerShdw>
           </a:effectLst>
         </p:spPr>
+        <p:txBody>
+          <a:bodyPr/>
+          <a:lstStyle/>
+          <a:p>
+            <a:endParaRPr lang="en-MY"/>
+          </a:p>
+        </p:txBody>
       </p:sp>
       <p:sp>
         <p:nvSpPr>
@@ -7681,6 +8047,13 @@
             <a:prstDash val="solid"/>
           </a:ln>
         </p:spPr>
+        <p:txBody>
+          <a:bodyPr/>
+          <a:lstStyle/>
+          <a:p>
+            <a:endParaRPr lang="en-MY"/>
+          </a:p>
+        </p:txBody>
       </p:sp>
       <p:sp>
         <p:nvSpPr>
@@ -7745,6 +8118,13 @@
             <a:prstDash val="solid"/>
           </a:ln>
         </p:spPr>
+        <p:txBody>
+          <a:bodyPr/>
+          <a:lstStyle/>
+          <a:p>
+            <a:endParaRPr lang="en-MY"/>
+          </a:p>
+        </p:txBody>
       </p:sp>
       <p:sp>
         <p:nvSpPr>
@@ -7826,6 +8206,13 @@
             <a:prstDash val="solid"/>
           </a:ln>
         </p:spPr>
+        <p:txBody>
+          <a:bodyPr/>
+          <a:lstStyle/>
+          <a:p>
+            <a:endParaRPr lang="en-MY"/>
+          </a:p>
+        </p:txBody>
       </p:sp>
       <p:sp>
         <p:nvSpPr>
@@ -7907,6 +8294,13 @@
             <a:prstDash val="solid"/>
           </a:ln>
         </p:spPr>
+        <p:txBody>
+          <a:bodyPr/>
+          <a:lstStyle/>
+          <a:p>
+            <a:endParaRPr lang="en-MY"/>
+          </a:p>
+        </p:txBody>
       </p:sp>
       <p:sp>
         <p:nvSpPr>
@@ -7988,6 +8382,13 @@
             <a:prstDash val="solid"/>
           </a:ln>
         </p:spPr>
+        <p:txBody>
+          <a:bodyPr/>
+          <a:lstStyle/>
+          <a:p>
+            <a:endParaRPr lang="en-MY"/>
+          </a:p>
+        </p:txBody>
       </p:sp>
       <p:sp>
         <p:nvSpPr>
@@ -8028,6 +8429,94 @@
           </a:p>
         </p:txBody>
       </p:sp>
+      <p:cxnSp>
+        <p:nvCxnSpPr>
+          <p:cNvPr id="22" name="Connector: Curved 21">
+            <a:extLst>
+              <a:ext uri="{FF2B5EF4-FFF2-40B4-BE49-F238E27FC236}">
+                <a16:creationId xmlns:a16="http://schemas.microsoft.com/office/drawing/2014/main" id="{F8570659-505C-6805-169B-0C78274414D4}"/>
+              </a:ext>
+            </a:extLst>
+          </p:cNvPr>
+          <p:cNvCxnSpPr>
+            <a:cxnSpLocks/>
+            <a:endCxn id="17" idx="2"/>
+          </p:cNvCxnSpPr>
+          <p:nvPr/>
+        </p:nvCxnSpPr>
+        <p:spPr>
+          <a:xfrm rot="16200000" flipH="1">
+            <a:off x="4692546" y="2200279"/>
+            <a:ext cx="1869946" cy="1547615"/>
+          </a:xfrm>
+          <a:prstGeom prst="curvedConnector2">
+            <a:avLst/>
+          </a:prstGeom>
+          <a:ln w="38100">
+            <a:solidFill>
+              <a:srgbClr val="CC0000"/>
+            </a:solidFill>
+          </a:ln>
+        </p:spPr>
+        <p:style>
+          <a:lnRef idx="1">
+            <a:schemeClr val="accent1"/>
+          </a:lnRef>
+          <a:fillRef idx="0">
+            <a:schemeClr val="accent1"/>
+          </a:fillRef>
+          <a:effectRef idx="0">
+            <a:schemeClr val="accent1"/>
+          </a:effectRef>
+          <a:fontRef idx="minor">
+            <a:schemeClr val="tx1"/>
+          </a:fontRef>
+        </p:style>
+      </p:cxnSp>
+      <p:cxnSp>
+        <p:nvCxnSpPr>
+          <p:cNvPr id="25" name="Connector: Curved 24">
+            <a:extLst>
+              <a:ext uri="{FF2B5EF4-FFF2-40B4-BE49-F238E27FC236}">
+                <a16:creationId xmlns:a16="http://schemas.microsoft.com/office/drawing/2014/main" id="{3C060030-A995-4AFC-1857-06003F4F25EB}"/>
+              </a:ext>
+            </a:extLst>
+          </p:cNvPr>
+          <p:cNvCxnSpPr>
+            <a:cxnSpLocks/>
+            <a:stCxn id="17" idx="6"/>
+          </p:cNvCxnSpPr>
+          <p:nvPr/>
+        </p:nvCxnSpPr>
+        <p:spPr>
+          <a:xfrm flipV="1">
+            <a:off x="6674593" y="2039112"/>
+            <a:ext cx="1545771" cy="1869948"/>
+          </a:xfrm>
+          <a:prstGeom prst="curvedConnector2">
+            <a:avLst/>
+          </a:prstGeom>
+          <a:ln w="38100">
+            <a:solidFill>
+              <a:srgbClr val="CC0000"/>
+            </a:solidFill>
+          </a:ln>
+        </p:spPr>
+        <p:style>
+          <a:lnRef idx="1">
+            <a:schemeClr val="accent1"/>
+          </a:lnRef>
+          <a:fillRef idx="0">
+            <a:schemeClr val="accent1"/>
+          </a:fillRef>
+          <a:effectRef idx="0">
+            <a:schemeClr val="accent1"/>
+          </a:effectRef>
+          <a:fontRef idx="minor">
+            <a:schemeClr val="tx1"/>
+          </a:fontRef>
+        </p:style>
+      </p:cxnSp>
     </p:spTree>
   </p:cSld>
   <p:clrMapOvr>
@@ -8085,6 +8574,13 @@
             <a:prstDash val="solid"/>
           </a:ln>
         </p:spPr>
+        <p:txBody>
+          <a:bodyPr/>
+          <a:lstStyle/>
+          <a:p>
+            <a:endParaRPr lang="en-MY"/>
+          </a:p>
+        </p:txBody>
       </p:sp>
       <p:sp>
         <p:nvSpPr>
@@ -8190,6 +8686,13 @@
             <a:prstDash val="solid"/>
           </a:ln>
         </p:spPr>
+        <p:txBody>
+          <a:bodyPr/>
+          <a:lstStyle/>
+          <a:p>
+            <a:endParaRPr lang="en-MY"/>
+          </a:p>
+        </p:txBody>
       </p:sp>
       <p:sp>
         <p:nvSpPr>
@@ -8222,6 +8725,13 @@
             </a:outerShdw>
           </a:effectLst>
         </p:spPr>
+        <p:txBody>
+          <a:bodyPr/>
+          <a:lstStyle/>
+          <a:p>
+            <a:endParaRPr lang="en-MY"/>
+          </a:p>
+        </p:txBody>
       </p:sp>
       <p:sp>
         <p:nvSpPr>
@@ -8247,6 +8757,13 @@
             <a:prstDash val="solid"/>
           </a:ln>
         </p:spPr>
+        <p:txBody>
+          <a:bodyPr/>
+          <a:lstStyle/>
+          <a:p>
+            <a:endParaRPr lang="en-MY"/>
+          </a:p>
+        </p:txBody>
       </p:sp>
       <p:sp>
         <p:nvSpPr>
@@ -8474,6 +8991,13 @@
             </a:outerShdw>
           </a:effectLst>
         </p:spPr>
+        <p:txBody>
+          <a:bodyPr/>
+          <a:lstStyle/>
+          <a:p>
+            <a:endParaRPr lang="en-MY"/>
+          </a:p>
+        </p:txBody>
       </p:sp>
       <p:sp>
         <p:nvSpPr>
@@ -8499,6 +9023,13 @@
             <a:prstDash val="solid"/>
           </a:ln>
         </p:spPr>
+        <p:txBody>
+          <a:bodyPr/>
+          <a:lstStyle/>
+          <a:p>
+            <a:endParaRPr lang="en-MY"/>
+          </a:p>
+        </p:txBody>
       </p:sp>
       <p:sp>
         <p:nvSpPr>
@@ -8726,6 +9257,13 @@
             </a:outerShdw>
           </a:effectLst>
         </p:spPr>
+        <p:txBody>
+          <a:bodyPr/>
+          <a:lstStyle/>
+          <a:p>
+            <a:endParaRPr lang="en-MY"/>
+          </a:p>
+        </p:txBody>
       </p:sp>
       <p:sp>
         <p:nvSpPr>
@@ -8751,6 +9289,13 @@
             <a:prstDash val="solid"/>
           </a:ln>
         </p:spPr>
+        <p:txBody>
+          <a:bodyPr/>
+          <a:lstStyle/>
+          <a:p>
+            <a:endParaRPr lang="en-MY"/>
+          </a:p>
+        </p:txBody>
       </p:sp>
       <p:sp>
         <p:nvSpPr>
@@ -9104,6 +9649,13 @@
             <a:prstDash val="solid"/>
           </a:ln>
         </p:spPr>
+        <p:txBody>
+          <a:bodyPr/>
+          <a:lstStyle/>
+          <a:p>
+            <a:endParaRPr lang="en-MY"/>
+          </a:p>
+        </p:txBody>
       </p:sp>
       <p:sp>
         <p:nvSpPr>
@@ -9209,6 +9761,13 @@
             <a:prstDash val="solid"/>
           </a:ln>
         </p:spPr>
+        <p:txBody>
+          <a:bodyPr/>
+          <a:lstStyle/>
+          <a:p>
+            <a:endParaRPr lang="en-MY"/>
+          </a:p>
+        </p:txBody>
       </p:sp>
       <p:sp>
         <p:nvSpPr>
@@ -9241,6 +9800,13 @@
             </a:outerShdw>
           </a:effectLst>
         </p:spPr>
+        <p:txBody>
+          <a:bodyPr/>
+          <a:lstStyle/>
+          <a:p>
+            <a:endParaRPr lang="en-MY"/>
+          </a:p>
+        </p:txBody>
       </p:sp>
       <p:sp>
         <p:nvSpPr>
@@ -9266,6 +9832,13 @@
             <a:prstDash val="solid"/>
           </a:ln>
         </p:spPr>
+        <p:txBody>
+          <a:bodyPr/>
+          <a:lstStyle/>
+          <a:p>
+            <a:endParaRPr lang="en-MY"/>
+          </a:p>
+        </p:txBody>
       </p:sp>
       <p:sp>
         <p:nvSpPr>
@@ -9386,6 +9959,13 @@
             <a:prstDash val="solid"/>
           </a:ln>
         </p:spPr>
+        <p:txBody>
+          <a:bodyPr/>
+          <a:lstStyle/>
+          <a:p>
+            <a:endParaRPr lang="en-MY"/>
+          </a:p>
+        </p:txBody>
       </p:sp>
       <p:sp>
         <p:nvSpPr>
@@ -9474,6 +10054,13 @@
             </a:outerShdw>
           </a:effectLst>
         </p:spPr>
+        <p:txBody>
+          <a:bodyPr/>
+          <a:lstStyle/>
+          <a:p>
+            <a:endParaRPr lang="en-MY"/>
+          </a:p>
+        </p:txBody>
       </p:sp>
       <p:sp>
         <p:nvSpPr>
@@ -9499,6 +10086,13 @@
             <a:prstDash val="solid"/>
           </a:ln>
         </p:spPr>
+        <p:txBody>
+          <a:bodyPr/>
+          <a:lstStyle/>
+          <a:p>
+            <a:endParaRPr lang="en-MY"/>
+          </a:p>
+        </p:txBody>
       </p:sp>
       <p:sp>
         <p:nvSpPr>
@@ -9619,6 +10213,13 @@
             <a:prstDash val="solid"/>
           </a:ln>
         </p:spPr>
+        <p:txBody>
+          <a:bodyPr/>
+          <a:lstStyle/>
+          <a:p>
+            <a:endParaRPr lang="en-MY"/>
+          </a:p>
+        </p:txBody>
       </p:sp>
       <p:sp>
         <p:nvSpPr>
@@ -9707,6 +10308,13 @@
             </a:outerShdw>
           </a:effectLst>
         </p:spPr>
+        <p:txBody>
+          <a:bodyPr/>
+          <a:lstStyle/>
+          <a:p>
+            <a:endParaRPr lang="en-MY"/>
+          </a:p>
+        </p:txBody>
       </p:sp>
       <p:sp>
         <p:nvSpPr>
@@ -9732,6 +10340,13 @@
             <a:prstDash val="solid"/>
           </a:ln>
         </p:spPr>
+        <p:txBody>
+          <a:bodyPr/>
+          <a:lstStyle/>
+          <a:p>
+            <a:endParaRPr lang="en-MY"/>
+          </a:p>
+        </p:txBody>
       </p:sp>
       <p:sp>
         <p:nvSpPr>
@@ -9852,6 +10467,13 @@
             <a:prstDash val="solid"/>
           </a:ln>
         </p:spPr>
+        <p:txBody>
+          <a:bodyPr/>
+          <a:lstStyle/>
+          <a:p>
+            <a:endParaRPr lang="en-MY"/>
+          </a:p>
+        </p:txBody>
       </p:sp>
       <p:sp>
         <p:nvSpPr>
@@ -9940,6 +10562,13 @@
             </a:outerShdw>
           </a:effectLst>
         </p:spPr>
+        <p:txBody>
+          <a:bodyPr/>
+          <a:lstStyle/>
+          <a:p>
+            <a:endParaRPr lang="en-MY"/>
+          </a:p>
+        </p:txBody>
       </p:sp>
       <p:sp>
         <p:nvSpPr>
@@ -9965,6 +10594,13 @@
             <a:prstDash val="solid"/>
           </a:ln>
         </p:spPr>
+        <p:txBody>
+          <a:bodyPr/>
+          <a:lstStyle/>
+          <a:p>
+            <a:endParaRPr lang="en-MY"/>
+          </a:p>
+        </p:txBody>
       </p:sp>
       <p:sp>
         <p:nvSpPr>
@@ -10085,6 +10721,13 @@
             <a:prstDash val="solid"/>
           </a:ln>
         </p:spPr>
+        <p:txBody>
+          <a:bodyPr/>
+          <a:lstStyle/>
+          <a:p>
+            <a:endParaRPr lang="en-MY"/>
+          </a:p>
+        </p:txBody>
       </p:sp>
       <p:sp>
         <p:nvSpPr>
@@ -10283,6 +10926,13 @@
             <a:prstDash val="solid"/>
           </a:ln>
         </p:spPr>
+        <p:txBody>
+          <a:bodyPr/>
+          <a:lstStyle/>
+          <a:p>
+            <a:endParaRPr lang="en-MY"/>
+          </a:p>
+        </p:txBody>
       </p:sp>
       <p:sp>
         <p:nvSpPr>
@@ -10380,6 +11030,13 @@
             <a:prstDash val="solid"/>
           </a:ln>
         </p:spPr>
+        <p:txBody>
+          <a:bodyPr/>
+          <a:lstStyle/>
+          <a:p>
+            <a:endParaRPr lang="en-MY"/>
+          </a:p>
+        </p:txBody>
       </p:sp>
       <p:sp>
         <p:nvSpPr>
@@ -10485,6 +11142,13 @@
             <a:prstDash val="solid"/>
           </a:ln>
         </p:spPr>
+        <p:txBody>
+          <a:bodyPr/>
+          <a:lstStyle/>
+          <a:p>
+            <a:endParaRPr lang="en-MY"/>
+          </a:p>
+        </p:txBody>
       </p:sp>
       <p:sp>
         <p:nvSpPr>
@@ -10517,6 +11181,13 @@
             </a:outerShdw>
           </a:effectLst>
         </p:spPr>
+        <p:txBody>
+          <a:bodyPr/>
+          <a:lstStyle/>
+          <a:p>
+            <a:endParaRPr lang="en-MY"/>
+          </a:p>
+        </p:txBody>
       </p:sp>
       <p:sp>
         <p:nvSpPr>
@@ -10542,6 +11213,13 @@
             <a:prstDash val="solid"/>
           </a:ln>
         </p:spPr>
+        <p:txBody>
+          <a:bodyPr/>
+          <a:lstStyle/>
+          <a:p>
+            <a:endParaRPr lang="en-MY"/>
+          </a:p>
+        </p:txBody>
       </p:sp>
       <p:sp>
         <p:nvSpPr>
@@ -10822,6 +11500,13 @@
             </a:outerShdw>
           </a:effectLst>
         </p:spPr>
+        <p:txBody>
+          <a:bodyPr/>
+          <a:lstStyle/>
+          <a:p>
+            <a:endParaRPr lang="en-MY"/>
+          </a:p>
+        </p:txBody>
       </p:sp>
       <p:sp>
         <p:nvSpPr>
@@ -10847,6 +11532,13 @@
             <a:prstDash val="solid"/>
           </a:ln>
         </p:spPr>
+        <p:txBody>
+          <a:bodyPr/>
+          <a:lstStyle/>
+          <a:p>
+            <a:endParaRPr lang="en-MY"/>
+          </a:p>
+        </p:txBody>
       </p:sp>
       <p:sp>
         <p:nvSpPr>
@@ -10959,7 +11651,23 @@
                 <a:ea typeface="Consolas" pitchFamily="34" charset="-122"/>
                 <a:cs typeface="Consolas" pitchFamily="34" charset="-120"/>
               </a:rPr>
-              <a:t>φ(x) = ReLU(Wx),  solve linear readout only</a:t>
+              <a:t>φ(x) = ReLU(Wx),  </a:t>
+            </a:r>
+          </a:p>
+          <a:p>
+            <a:pPr marL="0" indent="0" algn="ctr">
+              <a:buNone/>
+            </a:pPr>
+            <a:r>
+              <a:rPr lang="en-US" sz="1200" b="1" i="1" dirty="0">
+                <a:solidFill>
+                  <a:srgbClr val="0F1F40"/>
+                </a:solidFill>
+                <a:latin typeface="Consolas" pitchFamily="34" charset="0"/>
+                <a:ea typeface="Consolas" pitchFamily="34" charset="-122"/>
+                <a:cs typeface="Consolas" pitchFamily="34" charset="-120"/>
+              </a:rPr>
+              <a:t>solve linear readout only</a:t>
             </a:r>
             <a:endParaRPr lang="en-US" sz="1200" dirty="0"/>
           </a:p>
@@ -11071,6 +11779,13 @@
             <a:prstDash val="solid"/>
           </a:ln>
         </p:spPr>
+        <p:txBody>
+          <a:bodyPr/>
+          <a:lstStyle/>
+          <a:p>
+            <a:endParaRPr lang="en-MY"/>
+          </a:p>
+        </p:txBody>
       </p:sp>
       <p:sp>
         <p:nvSpPr>
@@ -11207,6 +11922,13 @@
             <a:prstDash val="solid"/>
           </a:ln>
         </p:spPr>
+        <p:txBody>
+          <a:bodyPr/>
+          <a:lstStyle/>
+          <a:p>
+            <a:endParaRPr lang="en-MY"/>
+          </a:p>
+        </p:txBody>
       </p:sp>
       <p:sp>
         <p:nvSpPr>
@@ -11312,6 +12034,13 @@
             <a:prstDash val="solid"/>
           </a:ln>
         </p:spPr>
+        <p:txBody>
+          <a:bodyPr/>
+          <a:lstStyle/>
+          <a:p>
+            <a:endParaRPr lang="en-MY"/>
+          </a:p>
+        </p:txBody>
       </p:sp>
       <p:sp>
         <p:nvSpPr>
@@ -11344,6 +12073,13 @@
             </a:outerShdw>
           </a:effectLst>
         </p:spPr>
+        <p:txBody>
+          <a:bodyPr/>
+          <a:lstStyle/>
+          <a:p>
+            <a:endParaRPr lang="en-MY"/>
+          </a:p>
+        </p:txBody>
       </p:sp>
       <p:sp>
         <p:nvSpPr>
@@ -11369,6 +12105,13 @@
             <a:prstDash val="solid"/>
           </a:ln>
         </p:spPr>
+        <p:txBody>
+          <a:bodyPr/>
+          <a:lstStyle/>
+          <a:p>
+            <a:endParaRPr lang="en-MY"/>
+          </a:p>
+        </p:txBody>
       </p:sp>
       <p:sp>
         <p:nvSpPr>
@@ -11433,6 +12176,13 @@
             <a:prstDash val="solid"/>
           </a:ln>
         </p:spPr>
+        <p:txBody>
+          <a:bodyPr/>
+          <a:lstStyle/>
+          <a:p>
+            <a:endParaRPr lang="en-MY"/>
+          </a:p>
+        </p:txBody>
       </p:sp>
       <p:sp>
         <p:nvSpPr>
@@ -11497,6 +12247,13 @@
             <a:prstDash val="solid"/>
           </a:ln>
         </p:spPr>
+        <p:txBody>
+          <a:bodyPr/>
+          <a:lstStyle/>
+          <a:p>
+            <a:endParaRPr lang="en-MY"/>
+          </a:p>
+        </p:txBody>
       </p:sp>
       <p:sp>
         <p:nvSpPr>
@@ -11561,6 +12318,13 @@
             <a:prstDash val="solid"/>
           </a:ln>
         </p:spPr>
+        <p:txBody>
+          <a:bodyPr/>
+          <a:lstStyle/>
+          <a:p>
+            <a:endParaRPr lang="en-MY"/>
+          </a:p>
+        </p:txBody>
       </p:sp>
       <p:sp>
         <p:nvSpPr>
@@ -11681,6 +12445,13 @@
             <a:prstDash val="solid"/>
           </a:ln>
         </p:spPr>
+        <p:txBody>
+          <a:bodyPr/>
+          <a:lstStyle/>
+          <a:p>
+            <a:endParaRPr lang="en-MY"/>
+          </a:p>
+        </p:txBody>
       </p:sp>
       <p:sp>
         <p:nvSpPr>
@@ -11953,6 +12724,13 @@
             </a:outerShdw>
           </a:effectLst>
         </p:spPr>
+        <p:txBody>
+          <a:bodyPr/>
+          <a:lstStyle/>
+          <a:p>
+            <a:endParaRPr lang="en-MY"/>
+          </a:p>
+        </p:txBody>
       </p:sp>
       <p:sp>
         <p:nvSpPr>
@@ -11978,6 +12756,13 @@
             <a:prstDash val="solid"/>
           </a:ln>
         </p:spPr>
+        <p:txBody>
+          <a:bodyPr/>
+          <a:lstStyle/>
+          <a:p>
+            <a:endParaRPr lang="en-MY"/>
+          </a:p>
+        </p:txBody>
       </p:sp>
       <p:sp>
         <p:nvSpPr>
@@ -12608,6 +13393,13 @@
             <a:prstDash val="solid"/>
           </a:ln>
         </p:spPr>
+        <p:txBody>
+          <a:bodyPr/>
+          <a:lstStyle/>
+          <a:p>
+            <a:endParaRPr lang="en-MY"/>
+          </a:p>
+        </p:txBody>
       </p:sp>
       <p:sp>
         <p:nvSpPr>
@@ -12713,6 +13505,13 @@
             <a:prstDash val="solid"/>
           </a:ln>
         </p:spPr>
+        <p:txBody>
+          <a:bodyPr/>
+          <a:lstStyle/>
+          <a:p>
+            <a:endParaRPr lang="en-MY"/>
+          </a:p>
+        </p:txBody>
       </p:sp>
       <p:graphicFrame>
         <p:nvGraphicFramePr>
@@ -12754,6 +13553,13 @@
             <a:prstDash val="solid"/>
           </a:ln>
         </p:spPr>
+        <p:txBody>
+          <a:bodyPr/>
+          <a:lstStyle/>
+          <a:p>
+            <a:endParaRPr lang="en-MY"/>
+          </a:p>
+        </p:txBody>
       </p:sp>
       <p:sp>
         <p:nvSpPr>
@@ -12842,6 +13648,13 @@
             </a:outerShdw>
           </a:effectLst>
         </p:spPr>
+        <p:txBody>
+          <a:bodyPr/>
+          <a:lstStyle/>
+          <a:p>
+            <a:endParaRPr lang="en-MY"/>
+          </a:p>
+        </p:txBody>
       </p:sp>
       <p:sp>
         <p:nvSpPr>
@@ -13033,6 +13846,13 @@
             <a:prstDash val="solid"/>
           </a:ln>
         </p:spPr>
+        <p:txBody>
+          <a:bodyPr/>
+          <a:lstStyle/>
+          <a:p>
+            <a:endParaRPr lang="en-MY"/>
+          </a:p>
+        </p:txBody>
       </p:sp>
       <p:sp>
         <p:nvSpPr>
@@ -13106,7 +13926,7 @@
                 <a:ea typeface="Calibri" pitchFamily="34" charset="-122"/>
                 <a:cs typeface="Calibri" pitchFamily="34" charset="-120"/>
               </a:rPr>
-              <a:t>x-axis: hidden width m (log scale implied).  y-axis: MSE.  Data: n_train=256, noise_std=0.5, Adam, early-stop at train MSE&lt;1e-8.</a:t>
+              <a:t>x-axis: hidden width m. y-axis: MSE.  Data: n_train=256, noise_std=0.5, Adam, early-stop at train MSE&lt;1e-8.</a:t>
             </a:r>
             <a:endParaRPr lang="en-US" sz="900" dirty="0"/>
           </a:p>
@@ -13169,6 +13989,13 @@
             <a:prstDash val="solid"/>
           </a:ln>
         </p:spPr>
+        <p:txBody>
+          <a:bodyPr/>
+          <a:lstStyle/>
+          <a:p>
+            <a:endParaRPr lang="en-MY"/>
+          </a:p>
+        </p:txBody>
       </p:sp>
       <p:sp>
         <p:nvSpPr>
@@ -13194,6 +14021,13 @@
             <a:prstDash val="solid"/>
           </a:ln>
         </p:spPr>
+        <p:txBody>
+          <a:bodyPr/>
+          <a:lstStyle/>
+          <a:p>
+            <a:endParaRPr lang="en-MY"/>
+          </a:p>
+        </p:txBody>
       </p:sp>
       <p:sp>
         <p:nvSpPr>
@@ -13297,6 +14131,13 @@
             <a:prstDash val="solid"/>
           </a:ln>
         </p:spPr>
+        <p:txBody>
+          <a:bodyPr/>
+          <a:lstStyle/>
+          <a:p>
+            <a:endParaRPr lang="en-MY"/>
+          </a:p>
+        </p:txBody>
       </p:sp>
       <p:sp>
         <p:nvSpPr>

--- a/slides/double_descent_presentation.pptx
+++ b/slides/double_descent_presentation.pptx
@@ -144,7 +144,7 @@
 <file path=ppt/revisionInfo.xml><?xml version="1.0" encoding="utf-8"?>
 <p1510:revInfo xmlns:a="http://schemas.openxmlformats.org/drawingml/2006/main" xmlns:r="http://schemas.openxmlformats.org/officeDocument/2006/relationships" xmlns:p1510="http://schemas.microsoft.com/office/powerpoint/2015/10/main">
   <p1510:revLst>
-    <p1510:client id="{C78EDCF7-2E7A-475C-B070-2104BFA8BAA3}" v="19" dt="2026-03-13T12:26:17.995"/>
+    <p1510:client id="{C78EDCF7-2E7A-475C-B070-2104BFA8BAA3}" v="23" dt="2026-03-17T09:25:04.719"/>
   </p1510:revLst>
 </p1510:revInfo>
 </file>
@@ -154,7 +154,7 @@
   <pc:docChgLst>
     <pc:chgData name="Le Jiayang" userId="72dc08ead7328938" providerId="LiveId" clId="{2E694533-A3D7-44F0-8378-4BF09FAADAF7}"/>
     <pc:docChg chg="undo custSel delSld modSld modMainMaster">
-      <pc:chgData name="Le Jiayang" userId="72dc08ead7328938" providerId="LiveId" clId="{2E694533-A3D7-44F0-8378-4BF09FAADAF7}" dt="2026-03-16T11:52:16.600" v="184" actId="1582"/>
+      <pc:chgData name="Le Jiayang" userId="72dc08ead7328938" providerId="LiveId" clId="{2E694533-A3D7-44F0-8378-4BF09FAADAF7}" dt="2026-03-17T09:26:15.888" v="228" actId="20577"/>
       <pc:docMkLst>
         <pc:docMk/>
       </pc:docMkLst>
@@ -291,12 +291,28 @@
           </ac:cxnSpMkLst>
         </pc:cxnChg>
       </pc:sldChg>
-      <pc:sldChg chg="setBg">
-        <pc:chgData name="Le Jiayang" userId="72dc08ead7328938" providerId="LiveId" clId="{2E694533-A3D7-44F0-8378-4BF09FAADAF7}" dt="2026-03-13T10:57:37.500" v="5"/>
+      <pc:sldChg chg="modSp mod setBg">
+        <pc:chgData name="Le Jiayang" userId="72dc08ead7328938" providerId="LiveId" clId="{2E694533-A3D7-44F0-8378-4BF09FAADAF7}" dt="2026-03-17T08:08:48.845" v="206" actId="20577"/>
         <pc:sldMkLst>
           <pc:docMk/>
           <pc:sldMk cId="0" sldId="259"/>
         </pc:sldMkLst>
+        <pc:spChg chg="mod">
+          <ac:chgData name="Le Jiayang" userId="72dc08ead7328938" providerId="LiveId" clId="{2E694533-A3D7-44F0-8378-4BF09FAADAF7}" dt="2026-03-17T08:08:48.845" v="206" actId="20577"/>
+          <ac:spMkLst>
+            <pc:docMk/>
+            <pc:sldMk cId="0" sldId="259"/>
+            <ac:spMk id="19" creationId="{00000000-0000-0000-0000-000000000000}"/>
+          </ac:spMkLst>
+        </pc:spChg>
+        <pc:spChg chg="mod">
+          <ac:chgData name="Le Jiayang" userId="72dc08ead7328938" providerId="LiveId" clId="{2E694533-A3D7-44F0-8378-4BF09FAADAF7}" dt="2026-03-17T08:08:32.724" v="201" actId="20577"/>
+          <ac:spMkLst>
+            <pc:docMk/>
+            <pc:sldMk cId="0" sldId="259"/>
+            <ac:spMk id="26" creationId="{00000000-0000-0000-0000-000000000000}"/>
+          </ac:spMkLst>
+        </pc:spChg>
       </pc:sldChg>
       <pc:sldChg chg="setBg">
         <pc:chgData name="Le Jiayang" userId="72dc08ead7328938" providerId="LiveId" clId="{2E694533-A3D7-44F0-8378-4BF09FAADAF7}" dt="2026-03-13T10:57:37.500" v="5"/>
@@ -306,11 +322,19 @@
         </pc:sldMkLst>
       </pc:sldChg>
       <pc:sldChg chg="modSp mod setBg">
-        <pc:chgData name="Le Jiayang" userId="72dc08ead7328938" providerId="LiveId" clId="{2E694533-A3D7-44F0-8378-4BF09FAADAF7}" dt="2026-03-16T11:50:03.129" v="165" actId="20577"/>
+        <pc:chgData name="Le Jiayang" userId="72dc08ead7328938" providerId="LiveId" clId="{2E694533-A3D7-44F0-8378-4BF09FAADAF7}" dt="2026-03-17T08:14:12.264" v="214" actId="20577"/>
         <pc:sldMkLst>
           <pc:docMk/>
           <pc:sldMk cId="0" sldId="261"/>
         </pc:sldMkLst>
+        <pc:spChg chg="mod">
+          <ac:chgData name="Le Jiayang" userId="72dc08ead7328938" providerId="LiveId" clId="{2E694533-A3D7-44F0-8378-4BF09FAADAF7}" dt="2026-03-17T08:14:12.264" v="214" actId="20577"/>
+          <ac:spMkLst>
+            <pc:docMk/>
+            <pc:sldMk cId="0" sldId="261"/>
+            <ac:spMk id="9" creationId="{00000000-0000-0000-0000-000000000000}"/>
+          </ac:spMkLst>
+        </pc:spChg>
         <pc:spChg chg="mod">
           <ac:chgData name="Le Jiayang" userId="72dc08ead7328938" providerId="LiveId" clId="{2E694533-A3D7-44F0-8378-4BF09FAADAF7}" dt="2026-03-16T11:50:03.129" v="165" actId="20577"/>
           <ac:spMkLst>
@@ -401,7 +425,7 @@
         </pc:sldMkLst>
       </pc:sldChg>
       <pc:sldChg chg="modSp mod setBg">
-        <pc:chgData name="Le Jiayang" userId="72dc08ead7328938" providerId="LiveId" clId="{2E694533-A3D7-44F0-8378-4BF09FAADAF7}" dt="2026-03-13T11:39:24.585" v="118" actId="20577"/>
+        <pc:chgData name="Le Jiayang" userId="72dc08ead7328938" providerId="LiveId" clId="{2E694533-A3D7-44F0-8378-4BF09FAADAF7}" dt="2026-03-17T09:26:15.888" v="228" actId="20577"/>
         <pc:sldMkLst>
           <pc:docMk/>
           <pc:sldMk cId="0" sldId="272"/>
@@ -415,11 +439,43 @@
           </ac:spMkLst>
         </pc:spChg>
         <pc:spChg chg="mod">
+          <ac:chgData name="Le Jiayang" userId="72dc08ead7328938" providerId="LiveId" clId="{2E694533-A3D7-44F0-8378-4BF09FAADAF7}" dt="2026-03-17T09:26:07.237" v="222" actId="20577"/>
+          <ac:spMkLst>
+            <pc:docMk/>
+            <pc:sldMk cId="0" sldId="272"/>
+            <ac:spMk id="18" creationId="{00000000-0000-0000-0000-000000000000}"/>
+          </ac:spMkLst>
+        </pc:spChg>
+        <pc:spChg chg="mod">
+          <ac:chgData name="Le Jiayang" userId="72dc08ead7328938" providerId="LiveId" clId="{2E694533-A3D7-44F0-8378-4BF09FAADAF7}" dt="2026-03-17T09:24:56.710" v="216"/>
+          <ac:spMkLst>
+            <pc:docMk/>
+            <pc:sldMk cId="0" sldId="272"/>
+            <ac:spMk id="20" creationId="{00000000-0000-0000-0000-000000000000}"/>
+          </ac:spMkLst>
+        </pc:spChg>
+        <pc:spChg chg="mod">
+          <ac:chgData name="Le Jiayang" userId="72dc08ead7328938" providerId="LiveId" clId="{2E694533-A3D7-44F0-8378-4BF09FAADAF7}" dt="2026-03-17T09:26:15.888" v="228" actId="20577"/>
+          <ac:spMkLst>
+            <pc:docMk/>
+            <pc:sldMk cId="0" sldId="272"/>
+            <ac:spMk id="21" creationId="{00000000-0000-0000-0000-000000000000}"/>
+          </ac:spMkLst>
+        </pc:spChg>
+        <pc:spChg chg="mod">
           <ac:chgData name="Le Jiayang" userId="72dc08ead7328938" providerId="LiveId" clId="{2E694533-A3D7-44F0-8378-4BF09FAADAF7}" dt="2026-03-13T11:39:24.585" v="118" actId="20577"/>
           <ac:spMkLst>
             <pc:docMk/>
             <pc:sldMk cId="0" sldId="272"/>
             <ac:spMk id="23" creationId="{00000000-0000-0000-0000-000000000000}"/>
+          </ac:spMkLst>
+        </pc:spChg>
+        <pc:spChg chg="mod">
+          <ac:chgData name="Le Jiayang" userId="72dc08ead7328938" providerId="LiveId" clId="{2E694533-A3D7-44F0-8378-4BF09FAADAF7}" dt="2026-03-17T09:26:11.343" v="225" actId="20577"/>
+          <ac:spMkLst>
+            <pc:docMk/>
+            <pc:sldMk cId="0" sldId="272"/>
+            <ac:spMk id="24" creationId="{00000000-0000-0000-0000-000000000000}"/>
           </ac:spMkLst>
         </pc:spChg>
       </pc:sldChg>
@@ -1064,7 +1120,7 @@
           <a:bodyPr/>
           <a:lstStyle/>
           <a:p>
-            <a:endParaRPr lang="en-MY"/>
+            <a:endParaRPr lang="en-MY" dirty="0"/>
           </a:p>
         </p:txBody>
       </p:sp>
@@ -1155,7 +1211,7 @@
           <a:bodyPr/>
           <a:lstStyle/>
           <a:p>
-            <a:endParaRPr lang="en-MY"/>
+            <a:endParaRPr lang="en-MY" dirty="0"/>
           </a:p>
         </p:txBody>
       </p:sp>
@@ -1246,7 +1302,7 @@
           <a:bodyPr/>
           <a:lstStyle/>
           <a:p>
-            <a:endParaRPr lang="en-MY"/>
+            <a:endParaRPr lang="en-MY" dirty="0"/>
           </a:p>
         </p:txBody>
       </p:sp>
@@ -1337,7 +1393,7 @@
           <a:bodyPr/>
           <a:lstStyle/>
           <a:p>
-            <a:endParaRPr lang="en-MY"/>
+            <a:endParaRPr lang="en-MY" dirty="0"/>
           </a:p>
         </p:txBody>
       </p:sp>
@@ -1428,7 +1484,7 @@
           <a:bodyPr/>
           <a:lstStyle/>
           <a:p>
-            <a:endParaRPr lang="en-MY"/>
+            <a:endParaRPr lang="en-MY" dirty="0"/>
           </a:p>
         </p:txBody>
       </p:sp>
@@ -1519,7 +1575,7 @@
           <a:bodyPr/>
           <a:lstStyle/>
           <a:p>
-            <a:endParaRPr lang="en-MY"/>
+            <a:endParaRPr lang="en-MY" dirty="0"/>
           </a:p>
         </p:txBody>
       </p:sp>
@@ -1610,7 +1666,7 @@
           <a:bodyPr/>
           <a:lstStyle/>
           <a:p>
-            <a:endParaRPr lang="en-MY"/>
+            <a:endParaRPr lang="en-MY" dirty="0"/>
           </a:p>
         </p:txBody>
       </p:sp>
@@ -1701,7 +1757,7 @@
           <a:bodyPr/>
           <a:lstStyle/>
           <a:p>
-            <a:endParaRPr lang="en-MY"/>
+            <a:endParaRPr lang="en-MY" dirty="0"/>
           </a:p>
         </p:txBody>
       </p:sp>
@@ -1792,7 +1848,7 @@
           <a:bodyPr/>
           <a:lstStyle/>
           <a:p>
-            <a:endParaRPr lang="en-MY"/>
+            <a:endParaRPr lang="en-MY" dirty="0"/>
           </a:p>
         </p:txBody>
       </p:sp>
@@ -1883,7 +1939,7 @@
           <a:bodyPr/>
           <a:lstStyle/>
           <a:p>
-            <a:endParaRPr lang="en-MY"/>
+            <a:endParaRPr lang="en-MY" dirty="0"/>
           </a:p>
         </p:txBody>
       </p:sp>
@@ -1974,7 +2030,7 @@
           <a:bodyPr/>
           <a:lstStyle/>
           <a:p>
-            <a:endParaRPr lang="en-MY"/>
+            <a:endParaRPr lang="en-MY" dirty="0"/>
           </a:p>
         </p:txBody>
       </p:sp>
@@ -2065,7 +2121,7 @@
           <a:bodyPr/>
           <a:lstStyle/>
           <a:p>
-            <a:endParaRPr lang="en-MY"/>
+            <a:endParaRPr lang="en-MY" dirty="0"/>
           </a:p>
         </p:txBody>
       </p:sp>
@@ -2156,7 +2212,7 @@
           <a:bodyPr/>
           <a:lstStyle/>
           <a:p>
-            <a:endParaRPr lang="en-MY"/>
+            <a:endParaRPr lang="en-MY" dirty="0"/>
           </a:p>
         </p:txBody>
       </p:sp>
@@ -2247,7 +2303,7 @@
           <a:bodyPr/>
           <a:lstStyle/>
           <a:p>
-            <a:endParaRPr lang="en-MY"/>
+            <a:endParaRPr lang="en-MY" dirty="0"/>
           </a:p>
         </p:txBody>
       </p:sp>
@@ -2338,7 +2394,7 @@
           <a:bodyPr/>
           <a:lstStyle/>
           <a:p>
-            <a:endParaRPr lang="en-MY"/>
+            <a:endParaRPr lang="en-MY" dirty="0"/>
           </a:p>
         </p:txBody>
       </p:sp>
@@ -2429,7 +2485,7 @@
           <a:bodyPr/>
           <a:lstStyle/>
           <a:p>
-            <a:endParaRPr lang="en-MY"/>
+            <a:endParaRPr lang="en-MY" dirty="0"/>
           </a:p>
         </p:txBody>
       </p:sp>
@@ -2853,7 +2909,7 @@
           <a:bodyPr/>
           <a:lstStyle/>
           <a:p>
-            <a:endParaRPr lang="en-MY"/>
+            <a:endParaRPr lang="en-MY" dirty="0"/>
           </a:p>
         </p:txBody>
       </p:sp>
@@ -2885,7 +2941,7 @@
           <a:bodyPr/>
           <a:lstStyle/>
           <a:p>
-            <a:endParaRPr lang="en-MY"/>
+            <a:endParaRPr lang="en-MY" dirty="0"/>
           </a:p>
         </p:txBody>
       </p:sp>
@@ -2974,7 +3030,7 @@
           <a:bodyPr/>
           <a:lstStyle/>
           <a:p>
-            <a:endParaRPr lang="en-MY"/>
+            <a:endParaRPr lang="en-MY" dirty="0"/>
           </a:p>
         </p:txBody>
       </p:sp>
@@ -3156,7 +3212,7 @@
           <a:bodyPr/>
           <a:lstStyle/>
           <a:p>
-            <a:endParaRPr lang="en-MY"/>
+            <a:endParaRPr lang="en-MY" dirty="0"/>
           </a:p>
         </p:txBody>
       </p:sp>
@@ -3257,7 +3313,7 @@
           <a:bodyPr/>
           <a:lstStyle/>
           <a:p>
-            <a:endParaRPr lang="en-MY"/>
+            <a:endParaRPr lang="en-MY" dirty="0"/>
           </a:p>
         </p:txBody>
       </p:sp>
@@ -3322,7 +3378,7 @@
           <a:bodyPr/>
           <a:lstStyle/>
           <a:p>
-            <a:endParaRPr lang="en-MY"/>
+            <a:endParaRPr lang="en-MY" dirty="0"/>
           </a:p>
         </p:txBody>
       </p:sp>
@@ -3354,7 +3410,7 @@
           <a:bodyPr/>
           <a:lstStyle/>
           <a:p>
-            <a:endParaRPr lang="en-MY"/>
+            <a:endParaRPr lang="en-MY" dirty="0"/>
           </a:p>
         </p:txBody>
       </p:sp>
@@ -3464,7 +3520,7 @@
           <a:bodyPr/>
           <a:lstStyle/>
           <a:p>
-            <a:endParaRPr lang="en-MY"/>
+            <a:endParaRPr lang="en-MY" dirty="0"/>
           </a:p>
         </p:txBody>
       </p:sp>
@@ -3607,7 +3663,7 @@
           <a:bodyPr/>
           <a:lstStyle/>
           <a:p>
-            <a:endParaRPr lang="en-MY"/>
+            <a:endParaRPr lang="en-MY" dirty="0"/>
           </a:p>
         </p:txBody>
       </p:sp>
@@ -3719,7 +3775,7 @@
           <a:bodyPr/>
           <a:lstStyle/>
           <a:p>
-            <a:endParaRPr lang="en-MY"/>
+            <a:endParaRPr lang="en-MY" dirty="0"/>
           </a:p>
         </p:txBody>
       </p:sp>
@@ -3784,7 +3840,7 @@
           <a:bodyPr/>
           <a:lstStyle/>
           <a:p>
-            <a:endParaRPr lang="en-MY"/>
+            <a:endParaRPr lang="en-MY" dirty="0"/>
           </a:p>
         </p:txBody>
       </p:sp>
@@ -3855,7 +3911,7 @@
           <a:bodyPr/>
           <a:lstStyle/>
           <a:p>
-            <a:endParaRPr lang="en-MY"/>
+            <a:endParaRPr lang="en-MY" dirty="0"/>
           </a:p>
         </p:txBody>
       </p:sp>
@@ -3887,7 +3943,7 @@
           <a:bodyPr/>
           <a:lstStyle/>
           <a:p>
-            <a:endParaRPr lang="en-MY"/>
+            <a:endParaRPr lang="en-MY" dirty="0"/>
           </a:p>
         </p:txBody>
       </p:sp>
@@ -3919,7 +3975,7 @@
           <a:bodyPr/>
           <a:lstStyle/>
           <a:p>
-            <a:endParaRPr lang="en-MY"/>
+            <a:endParaRPr lang="en-MY" dirty="0"/>
           </a:p>
         </p:txBody>
       </p:sp>
@@ -4029,7 +4085,7 @@
           <a:bodyPr/>
           <a:lstStyle/>
           <a:p>
-            <a:endParaRPr lang="en-MY"/>
+            <a:endParaRPr lang="en-MY" dirty="0"/>
           </a:p>
         </p:txBody>
       </p:sp>
@@ -4061,7 +4117,7 @@
           <a:bodyPr/>
           <a:lstStyle/>
           <a:p>
-            <a:endParaRPr lang="en-MY"/>
+            <a:endParaRPr lang="en-MY" dirty="0"/>
           </a:p>
         </p:txBody>
       </p:sp>
@@ -4093,7 +4149,7 @@
           <a:bodyPr/>
           <a:lstStyle/>
           <a:p>
-            <a:endParaRPr lang="en-MY"/>
+            <a:endParaRPr lang="en-MY" dirty="0"/>
           </a:p>
         </p:txBody>
       </p:sp>
@@ -4203,7 +4259,7 @@
           <a:bodyPr/>
           <a:lstStyle/>
           <a:p>
-            <a:endParaRPr lang="en-MY"/>
+            <a:endParaRPr lang="en-MY" dirty="0"/>
           </a:p>
         </p:txBody>
       </p:sp>
@@ -4235,7 +4291,7 @@
           <a:bodyPr/>
           <a:lstStyle/>
           <a:p>
-            <a:endParaRPr lang="en-MY"/>
+            <a:endParaRPr lang="en-MY" dirty="0"/>
           </a:p>
         </p:txBody>
       </p:sp>
@@ -4267,7 +4323,7 @@
           <a:bodyPr/>
           <a:lstStyle/>
           <a:p>
-            <a:endParaRPr lang="en-MY"/>
+            <a:endParaRPr lang="en-MY" dirty="0"/>
           </a:p>
         </p:txBody>
       </p:sp>
@@ -4377,7 +4433,7 @@
           <a:bodyPr/>
           <a:lstStyle/>
           <a:p>
-            <a:endParaRPr lang="en-MY"/>
+            <a:endParaRPr lang="en-MY" dirty="0"/>
           </a:p>
         </p:txBody>
       </p:sp>
@@ -4409,7 +4465,7 @@
           <a:bodyPr/>
           <a:lstStyle/>
           <a:p>
-            <a:endParaRPr lang="en-MY"/>
+            <a:endParaRPr lang="en-MY" dirty="0"/>
           </a:p>
         </p:txBody>
       </p:sp>
@@ -4441,7 +4497,7 @@
           <a:bodyPr/>
           <a:lstStyle/>
           <a:p>
-            <a:endParaRPr lang="en-MY"/>
+            <a:endParaRPr lang="en-MY" dirty="0"/>
           </a:p>
         </p:txBody>
       </p:sp>
@@ -4551,7 +4607,7 @@
           <a:bodyPr/>
           <a:lstStyle/>
           <a:p>
-            <a:endParaRPr lang="en-MY"/>
+            <a:endParaRPr lang="en-MY" dirty="0"/>
           </a:p>
         </p:txBody>
       </p:sp>
@@ -4583,7 +4639,7 @@
           <a:bodyPr/>
           <a:lstStyle/>
           <a:p>
-            <a:endParaRPr lang="en-MY"/>
+            <a:endParaRPr lang="en-MY" dirty="0"/>
           </a:p>
         </p:txBody>
       </p:sp>
@@ -4615,7 +4671,7 @@
           <a:bodyPr/>
           <a:lstStyle/>
           <a:p>
-            <a:endParaRPr lang="en-MY"/>
+            <a:endParaRPr lang="en-MY" dirty="0"/>
           </a:p>
         </p:txBody>
       </p:sp>
@@ -4758,7 +4814,7 @@
           <a:bodyPr/>
           <a:lstStyle/>
           <a:p>
-            <a:endParaRPr lang="en-MY"/>
+            <a:endParaRPr lang="en-MY" dirty="0"/>
           </a:p>
         </p:txBody>
       </p:sp>
@@ -4870,7 +4926,7 @@
           <a:bodyPr/>
           <a:lstStyle/>
           <a:p>
-            <a:endParaRPr lang="en-MY"/>
+            <a:endParaRPr lang="en-MY" dirty="0"/>
           </a:p>
         </p:txBody>
       </p:sp>
@@ -4909,7 +4965,7 @@
           <a:bodyPr/>
           <a:lstStyle/>
           <a:p>
-            <a:endParaRPr lang="en-MY"/>
+            <a:endParaRPr lang="en-MY" dirty="0"/>
           </a:p>
         </p:txBody>
       </p:sp>
@@ -4941,7 +4997,7 @@
           <a:bodyPr/>
           <a:lstStyle/>
           <a:p>
-            <a:endParaRPr lang="en-MY"/>
+            <a:endParaRPr lang="en-MY" dirty="0"/>
           </a:p>
         </p:txBody>
       </p:sp>
@@ -5146,7 +5202,7 @@
           <a:bodyPr/>
           <a:lstStyle/>
           <a:p>
-            <a:endParaRPr lang="en-MY"/>
+            <a:endParaRPr lang="en-MY" dirty="0"/>
           </a:p>
         </p:txBody>
       </p:sp>
@@ -5178,7 +5234,7 @@
           <a:bodyPr/>
           <a:lstStyle/>
           <a:p>
-            <a:endParaRPr lang="en-MY"/>
+            <a:endParaRPr lang="en-MY" dirty="0"/>
           </a:p>
         </p:txBody>
       </p:sp>
@@ -5409,7 +5465,7 @@
           <a:bodyPr/>
           <a:lstStyle/>
           <a:p>
-            <a:endParaRPr lang="en-MY"/>
+            <a:endParaRPr lang="en-MY" dirty="0"/>
           </a:p>
         </p:txBody>
       </p:sp>
@@ -5521,7 +5577,7 @@
           <a:bodyPr/>
           <a:lstStyle/>
           <a:p>
-            <a:endParaRPr lang="en-MY"/>
+            <a:endParaRPr lang="en-MY" dirty="0"/>
           </a:p>
         </p:txBody>
       </p:sp>
@@ -5560,7 +5616,7 @@
           <a:bodyPr/>
           <a:lstStyle/>
           <a:p>
-            <a:endParaRPr lang="en-MY"/>
+            <a:endParaRPr lang="en-MY" dirty="0"/>
           </a:p>
         </p:txBody>
       </p:sp>
@@ -5833,7 +5889,7 @@
           <a:bodyPr/>
           <a:lstStyle/>
           <a:p>
-            <a:endParaRPr lang="en-MY"/>
+            <a:endParaRPr lang="en-MY" dirty="0"/>
           </a:p>
         </p:txBody>
       </p:sp>
@@ -5865,7 +5921,7 @@
           <a:bodyPr/>
           <a:lstStyle/>
           <a:p>
-            <a:endParaRPr lang="en-MY"/>
+            <a:endParaRPr lang="en-MY" dirty="0"/>
           </a:p>
         </p:txBody>
       </p:sp>
@@ -5936,7 +5992,7 @@
           <a:bodyPr/>
           <a:lstStyle/>
           <a:p>
-            <a:endParaRPr lang="en-MY"/>
+            <a:endParaRPr lang="en-MY" dirty="0"/>
           </a:p>
         </p:txBody>
       </p:sp>
@@ -6012,7 +6068,7 @@
                 <a:ea typeface="Calibri" pitchFamily="34" charset="-122"/>
                 <a:cs typeface="Calibri" pitchFamily="34" charset="-120"/>
               </a:rPr>
-              <a:t>Double descent theory, teacher-student setup, Notebook 1, Slides 1–8</a:t>
+              <a:t>Double descent theory, teacher-student setup</a:t>
             </a:r>
             <a:endParaRPr lang="en-US" sz="1000" dirty="0"/>
           </a:p>
@@ -6046,7 +6102,7 @@
           <a:bodyPr/>
           <a:lstStyle/>
           <a:p>
-            <a:endParaRPr lang="en-MY"/>
+            <a:endParaRPr lang="en-MY" dirty="0"/>
           </a:p>
         </p:txBody>
       </p:sp>
@@ -6083,7 +6139,7 @@
                 <a:ea typeface="Calibri" pitchFamily="34" charset="-122"/>
                 <a:cs typeface="Calibri" pitchFamily="34" charset="-120"/>
               </a:rPr>
-              <a:t>Azis</a:t>
+              <a:t>Azis Maaraij Jamil </a:t>
             </a:r>
             <a:endParaRPr lang="en-US" sz="1200" dirty="0"/>
           </a:p>
@@ -6097,7 +6153,7 @@
         </p:nvSpPr>
         <p:spPr>
           <a:xfrm>
-            <a:off x="5779008" y="3072384"/>
+            <a:off x="5779008" y="3961055"/>
             <a:ext cx="2926080" cy="475488"/>
           </a:xfrm>
           <a:prstGeom prst="rect">
@@ -6122,7 +6178,7 @@
                 <a:ea typeface="Calibri" pitchFamily="34" charset="-122"/>
                 <a:cs typeface="Calibri" pitchFamily="34" charset="-120"/>
               </a:rPr>
-              <a:t>Optimizer comparison, SGD vs Adam analysis, Notebook 3, Slides 9–11</a:t>
+              <a:t>Optimizer comparison, SGD vs Adam analysis</a:t>
             </a:r>
             <a:endParaRPr lang="en-US" sz="1000" dirty="0"/>
           </a:p>
@@ -6156,7 +6212,7 @@
           <a:bodyPr/>
           <a:lstStyle/>
           <a:p>
-            <a:endParaRPr lang="en-MY"/>
+            <a:endParaRPr lang="en-MY" dirty="0"/>
           </a:p>
         </p:txBody>
       </p:sp>
@@ -6207,7 +6263,7 @@
         </p:nvSpPr>
         <p:spPr>
           <a:xfrm>
-            <a:off x="5779008" y="4023360"/>
+            <a:off x="5779008" y="3015817"/>
             <a:ext cx="2926080" cy="475488"/>
           </a:xfrm>
           <a:prstGeom prst="rect">
@@ -6232,7 +6288,7 @@
                 <a:ea typeface="Calibri" pitchFamily="34" charset="-122"/>
                 <a:cs typeface="Calibri" pitchFamily="34" charset="-120"/>
               </a:rPr>
-              <a:t>Regularization study, weight decay analysis, Notebook 2, Slides 12–14</a:t>
+              <a:t>Regularization study, weight decay analysis</a:t>
             </a:r>
             <a:endParaRPr lang="en-US" sz="1000" dirty="0"/>
           </a:p>
@@ -6266,7 +6322,7 @@
           <a:bodyPr/>
           <a:lstStyle/>
           <a:p>
-            <a:endParaRPr lang="en-MY"/>
+            <a:endParaRPr lang="en-MY" dirty="0"/>
           </a:p>
         </p:txBody>
       </p:sp>
@@ -6370,7 +6426,7 @@
           <a:bodyPr/>
           <a:lstStyle/>
           <a:p>
-            <a:endParaRPr lang="en-MY"/>
+            <a:endParaRPr lang="en-MY" dirty="0"/>
           </a:p>
         </p:txBody>
       </p:sp>
@@ -6402,7 +6458,7 @@
           <a:bodyPr/>
           <a:lstStyle/>
           <a:p>
-            <a:endParaRPr lang="en-MY"/>
+            <a:endParaRPr lang="en-MY" dirty="0"/>
           </a:p>
         </p:txBody>
       </p:sp>
@@ -6512,7 +6568,7 @@
           <a:bodyPr/>
           <a:lstStyle/>
           <a:p>
-            <a:endParaRPr lang="en-MY"/>
+            <a:endParaRPr lang="en-MY" dirty="0"/>
           </a:p>
         </p:txBody>
       </p:sp>
@@ -6583,7 +6639,7 @@
           <a:bodyPr/>
           <a:lstStyle/>
           <a:p>
-            <a:endParaRPr lang="en-MY"/>
+            <a:endParaRPr lang="en-MY" dirty="0"/>
           </a:p>
         </p:txBody>
       </p:sp>
@@ -6724,7 +6780,7 @@
           <a:bodyPr/>
           <a:lstStyle/>
           <a:p>
-            <a:endParaRPr lang="en-MY"/>
+            <a:endParaRPr lang="en-MY" dirty="0"/>
           </a:p>
         </p:txBody>
       </p:sp>
@@ -6802,7 +6858,7 @@
           <a:bodyPr/>
           <a:lstStyle/>
           <a:p>
-            <a:endParaRPr lang="en-MY"/>
+            <a:endParaRPr lang="en-MY" dirty="0"/>
           </a:p>
         </p:txBody>
       </p:sp>
@@ -6834,7 +6890,7 @@
           <a:bodyPr/>
           <a:lstStyle/>
           <a:p>
-            <a:endParaRPr lang="en-MY"/>
+            <a:endParaRPr lang="en-MY" dirty="0"/>
           </a:p>
         </p:txBody>
       </p:sp>
@@ -7007,7 +7063,7 @@
           <a:bodyPr/>
           <a:lstStyle/>
           <a:p>
-            <a:endParaRPr lang="en-MY"/>
+            <a:endParaRPr lang="en-MY" dirty="0"/>
           </a:p>
         </p:txBody>
       </p:sp>
@@ -7039,7 +7095,7 @@
           <a:bodyPr/>
           <a:lstStyle/>
           <a:p>
-            <a:endParaRPr lang="en-MY"/>
+            <a:endParaRPr lang="en-MY" dirty="0"/>
           </a:p>
         </p:txBody>
       </p:sp>
@@ -7195,7 +7251,7 @@
           <a:bodyPr/>
           <a:lstStyle/>
           <a:p>
-            <a:endParaRPr lang="en-MY"/>
+            <a:endParaRPr lang="en-MY" dirty="0"/>
           </a:p>
         </p:txBody>
       </p:sp>
@@ -7227,7 +7283,7 @@
           <a:bodyPr/>
           <a:lstStyle/>
           <a:p>
-            <a:endParaRPr lang="en-MY"/>
+            <a:endParaRPr lang="en-MY" dirty="0"/>
           </a:p>
         </p:txBody>
       </p:sp>
@@ -7400,7 +7456,7 @@
           <a:bodyPr/>
           <a:lstStyle/>
           <a:p>
-            <a:endParaRPr lang="en-MY"/>
+            <a:endParaRPr lang="en-MY" dirty="0"/>
           </a:p>
         </p:txBody>
       </p:sp>
@@ -7432,7 +7488,7 @@
           <a:bodyPr/>
           <a:lstStyle/>
           <a:p>
-            <a:endParaRPr lang="en-MY"/>
+            <a:endParaRPr lang="en-MY" dirty="0"/>
           </a:p>
         </p:txBody>
       </p:sp>
@@ -7631,7 +7687,7 @@
           <a:bodyPr/>
           <a:lstStyle/>
           <a:p>
-            <a:endParaRPr lang="en-MY"/>
+            <a:endParaRPr lang="en-MY" dirty="0"/>
           </a:p>
         </p:txBody>
       </p:sp>
@@ -7743,7 +7799,7 @@
           <a:bodyPr/>
           <a:lstStyle/>
           <a:p>
-            <a:endParaRPr lang="en-MY"/>
+            <a:endParaRPr lang="en-MY" dirty="0"/>
           </a:p>
         </p:txBody>
       </p:sp>
@@ -7782,7 +7838,7 @@
           <a:bodyPr/>
           <a:lstStyle/>
           <a:p>
-            <a:endParaRPr lang="en-MY"/>
+            <a:endParaRPr lang="en-MY" dirty="0"/>
           </a:p>
         </p:txBody>
       </p:sp>
@@ -7814,7 +7870,7 @@
           <a:bodyPr/>
           <a:lstStyle/>
           <a:p>
-            <a:endParaRPr lang="en-MY"/>
+            <a:endParaRPr lang="en-MY" dirty="0"/>
           </a:p>
         </p:txBody>
       </p:sp>
@@ -8019,7 +8075,7 @@
           <a:bodyPr/>
           <a:lstStyle/>
           <a:p>
-            <a:endParaRPr lang="en-MY"/>
+            <a:endParaRPr lang="en-MY" dirty="0"/>
           </a:p>
         </p:txBody>
       </p:sp>
@@ -8051,7 +8107,7 @@
           <a:bodyPr/>
           <a:lstStyle/>
           <a:p>
-            <a:endParaRPr lang="en-MY"/>
+            <a:endParaRPr lang="en-MY" dirty="0"/>
           </a:p>
         </p:txBody>
       </p:sp>
@@ -8122,7 +8178,7 @@
           <a:bodyPr/>
           <a:lstStyle/>
           <a:p>
-            <a:endParaRPr lang="en-MY"/>
+            <a:endParaRPr lang="en-MY" dirty="0"/>
           </a:p>
         </p:txBody>
       </p:sp>
@@ -8210,7 +8266,7 @@
           <a:bodyPr/>
           <a:lstStyle/>
           <a:p>
-            <a:endParaRPr lang="en-MY"/>
+            <a:endParaRPr lang="en-MY" dirty="0"/>
           </a:p>
         </p:txBody>
       </p:sp>
@@ -8298,7 +8354,7 @@
           <a:bodyPr/>
           <a:lstStyle/>
           <a:p>
-            <a:endParaRPr lang="en-MY"/>
+            <a:endParaRPr lang="en-MY" dirty="0"/>
           </a:p>
         </p:txBody>
       </p:sp>
@@ -8386,7 +8442,7 @@
           <a:bodyPr/>
           <a:lstStyle/>
           <a:p>
-            <a:endParaRPr lang="en-MY"/>
+            <a:endParaRPr lang="en-MY" dirty="0"/>
           </a:p>
         </p:txBody>
       </p:sp>
@@ -8578,7 +8634,7 @@
           <a:bodyPr/>
           <a:lstStyle/>
           <a:p>
-            <a:endParaRPr lang="en-MY"/>
+            <a:endParaRPr lang="en-MY" dirty="0"/>
           </a:p>
         </p:txBody>
       </p:sp>
@@ -8690,7 +8746,7 @@
           <a:bodyPr/>
           <a:lstStyle/>
           <a:p>
-            <a:endParaRPr lang="en-MY"/>
+            <a:endParaRPr lang="en-MY" dirty="0"/>
           </a:p>
         </p:txBody>
       </p:sp>
@@ -8729,7 +8785,7 @@
           <a:bodyPr/>
           <a:lstStyle/>
           <a:p>
-            <a:endParaRPr lang="en-MY"/>
+            <a:endParaRPr lang="en-MY" dirty="0"/>
           </a:p>
         </p:txBody>
       </p:sp>
@@ -8761,7 +8817,7 @@
           <a:bodyPr/>
           <a:lstStyle/>
           <a:p>
-            <a:endParaRPr lang="en-MY"/>
+            <a:endParaRPr lang="en-MY" dirty="0"/>
           </a:p>
         </p:txBody>
       </p:sp>
@@ -8995,7 +9051,7 @@
           <a:bodyPr/>
           <a:lstStyle/>
           <a:p>
-            <a:endParaRPr lang="en-MY"/>
+            <a:endParaRPr lang="en-MY" dirty="0"/>
           </a:p>
         </p:txBody>
       </p:sp>
@@ -9027,7 +9083,7 @@
           <a:bodyPr/>
           <a:lstStyle/>
           <a:p>
-            <a:endParaRPr lang="en-MY"/>
+            <a:endParaRPr lang="en-MY" dirty="0"/>
           </a:p>
         </p:txBody>
       </p:sp>
@@ -9208,9 +9264,11 @@
           <a:bodyPr wrap="square" rtlCol="0" anchor="t"/>
           <a:lstStyle/>
           <a:p>
-            <a:pPr marL="0" indent="0" algn="ctr">
-              <a:buNone/>
-            </a:pPr>
+            <a:pPr algn="ctr"/>
+            <a:r>
+              <a:rPr lang="en-US" sz="1100" dirty="0"/>
+              <a:t>Model fits training data exactly. Test error spikes at its peak</a:t>
+            </a:r>
             <a:r>
               <a:rPr lang="en-US" sz="1100" dirty="0">
                 <a:solidFill>
@@ -9220,7 +9278,21 @@
                 <a:ea typeface="Calibri" pitchFamily="34" charset="-122"/>
                 <a:cs typeface="Calibri" pitchFamily="34" charset="-120"/>
               </a:rPr>
-              <a:t>Model barely fits training data. Test error spikes — the 'crisis point'.</a:t>
+              <a:t>.</a:t>
+            </a:r>
+          </a:p>
+          <a:p>
+            <a:pPr algn="ctr"/>
+            <a:r>
+              <a:rPr lang="en-US" sz="1100" dirty="0">
+                <a:solidFill>
+                  <a:srgbClr val="334155"/>
+                </a:solidFill>
+                <a:latin typeface="Calibri" pitchFamily="34" charset="0"/>
+                <a:ea typeface="Calibri" pitchFamily="34" charset="-122"/>
+                <a:cs typeface="Calibri" pitchFamily="34" charset="-120"/>
+              </a:rPr>
+              <a:t>The 'crisis point'.</a:t>
             </a:r>
             <a:endParaRPr lang="en-US" sz="1100" dirty="0"/>
           </a:p>
@@ -9261,7 +9333,7 @@
           <a:bodyPr/>
           <a:lstStyle/>
           <a:p>
-            <a:endParaRPr lang="en-MY"/>
+            <a:endParaRPr lang="en-MY" dirty="0"/>
           </a:p>
         </p:txBody>
       </p:sp>
@@ -9293,7 +9365,7 @@
           <a:bodyPr/>
           <a:lstStyle/>
           <a:p>
-            <a:endParaRPr lang="en-MY"/>
+            <a:endParaRPr lang="en-MY" dirty="0"/>
           </a:p>
         </p:txBody>
       </p:sp>
@@ -9486,7 +9558,23 @@
                 <a:ea typeface="Calibri" pitchFamily="34" charset="-122"/>
                 <a:cs typeface="Calibri" pitchFamily="34" charset="-120"/>
               </a:rPr>
-              <a:t>Model overfits training data perfectly. But test error descends again — benign overfitting!</a:t>
+              <a:t>Model overfits training data perfectly. But test error descends again.</a:t>
+            </a:r>
+          </a:p>
+          <a:p>
+            <a:pPr marL="0" indent="0" algn="ctr">
+              <a:buNone/>
+            </a:pPr>
+            <a:r>
+              <a:rPr lang="en-US" sz="1100" dirty="0">
+                <a:solidFill>
+                  <a:srgbClr val="334155"/>
+                </a:solidFill>
+                <a:latin typeface="Calibri" pitchFamily="34" charset="0"/>
+                <a:ea typeface="Calibri" pitchFamily="34" charset="-122"/>
+                <a:cs typeface="Calibri" pitchFamily="34" charset="-120"/>
+              </a:rPr>
+              <a:t>Benign overfitting!</a:t>
             </a:r>
             <a:endParaRPr lang="en-US" sz="1100" dirty="0"/>
           </a:p>
@@ -9653,7 +9741,7 @@
           <a:bodyPr/>
           <a:lstStyle/>
           <a:p>
-            <a:endParaRPr lang="en-MY"/>
+            <a:endParaRPr lang="en-MY" dirty="0"/>
           </a:p>
         </p:txBody>
       </p:sp>
@@ -9765,7 +9853,7 @@
           <a:bodyPr/>
           <a:lstStyle/>
           <a:p>
-            <a:endParaRPr lang="en-MY"/>
+            <a:endParaRPr lang="en-MY" dirty="0"/>
           </a:p>
         </p:txBody>
       </p:sp>
@@ -9804,7 +9892,7 @@
           <a:bodyPr/>
           <a:lstStyle/>
           <a:p>
-            <a:endParaRPr lang="en-MY"/>
+            <a:endParaRPr lang="en-MY" dirty="0"/>
           </a:p>
         </p:txBody>
       </p:sp>
@@ -9836,7 +9924,7 @@
           <a:bodyPr/>
           <a:lstStyle/>
           <a:p>
-            <a:endParaRPr lang="en-MY"/>
+            <a:endParaRPr lang="en-MY" dirty="0"/>
           </a:p>
         </p:txBody>
       </p:sp>
@@ -9963,7 +10051,7 @@
           <a:bodyPr/>
           <a:lstStyle/>
           <a:p>
-            <a:endParaRPr lang="en-MY"/>
+            <a:endParaRPr lang="en-MY" dirty="0"/>
           </a:p>
         </p:txBody>
       </p:sp>
@@ -10058,7 +10146,7 @@
           <a:bodyPr/>
           <a:lstStyle/>
           <a:p>
-            <a:endParaRPr lang="en-MY"/>
+            <a:endParaRPr lang="en-MY" dirty="0"/>
           </a:p>
         </p:txBody>
       </p:sp>
@@ -10090,7 +10178,7 @@
           <a:bodyPr/>
           <a:lstStyle/>
           <a:p>
-            <a:endParaRPr lang="en-MY"/>
+            <a:endParaRPr lang="en-MY" dirty="0"/>
           </a:p>
         </p:txBody>
       </p:sp>
@@ -10217,7 +10305,7 @@
           <a:bodyPr/>
           <a:lstStyle/>
           <a:p>
-            <a:endParaRPr lang="en-MY"/>
+            <a:endParaRPr lang="en-MY" dirty="0"/>
           </a:p>
         </p:txBody>
       </p:sp>
@@ -10312,7 +10400,7 @@
           <a:bodyPr/>
           <a:lstStyle/>
           <a:p>
-            <a:endParaRPr lang="en-MY"/>
+            <a:endParaRPr lang="en-MY" dirty="0"/>
           </a:p>
         </p:txBody>
       </p:sp>
@@ -10344,7 +10432,7 @@
           <a:bodyPr/>
           <a:lstStyle/>
           <a:p>
-            <a:endParaRPr lang="en-MY"/>
+            <a:endParaRPr lang="en-MY" dirty="0"/>
           </a:p>
         </p:txBody>
       </p:sp>
@@ -10471,7 +10559,7 @@
           <a:bodyPr/>
           <a:lstStyle/>
           <a:p>
-            <a:endParaRPr lang="en-MY"/>
+            <a:endParaRPr lang="en-MY" dirty="0"/>
           </a:p>
         </p:txBody>
       </p:sp>
@@ -10566,7 +10654,7 @@
           <a:bodyPr/>
           <a:lstStyle/>
           <a:p>
-            <a:endParaRPr lang="en-MY"/>
+            <a:endParaRPr lang="en-MY" dirty="0"/>
           </a:p>
         </p:txBody>
       </p:sp>
@@ -10598,7 +10686,7 @@
           <a:bodyPr/>
           <a:lstStyle/>
           <a:p>
-            <a:endParaRPr lang="en-MY"/>
+            <a:endParaRPr lang="en-MY" dirty="0"/>
           </a:p>
         </p:txBody>
       </p:sp>
@@ -10725,7 +10813,7 @@
           <a:bodyPr/>
           <a:lstStyle/>
           <a:p>
-            <a:endParaRPr lang="en-MY"/>
+            <a:endParaRPr lang="en-MY" dirty="0"/>
           </a:p>
         </p:txBody>
       </p:sp>
@@ -10930,7 +11018,7 @@
           <a:bodyPr/>
           <a:lstStyle/>
           <a:p>
-            <a:endParaRPr lang="en-MY"/>
+            <a:endParaRPr lang="en-MY" dirty="0"/>
           </a:p>
         </p:txBody>
       </p:sp>
@@ -11034,7 +11122,7 @@
           <a:bodyPr/>
           <a:lstStyle/>
           <a:p>
-            <a:endParaRPr lang="en-MY"/>
+            <a:endParaRPr lang="en-MY" dirty="0"/>
           </a:p>
         </p:txBody>
       </p:sp>
@@ -11146,7 +11234,7 @@
           <a:bodyPr/>
           <a:lstStyle/>
           <a:p>
-            <a:endParaRPr lang="en-MY"/>
+            <a:endParaRPr lang="en-MY" dirty="0"/>
           </a:p>
         </p:txBody>
       </p:sp>
@@ -11185,7 +11273,7 @@
           <a:bodyPr/>
           <a:lstStyle/>
           <a:p>
-            <a:endParaRPr lang="en-MY"/>
+            <a:endParaRPr lang="en-MY" dirty="0"/>
           </a:p>
         </p:txBody>
       </p:sp>
@@ -11217,7 +11305,7 @@
           <a:bodyPr/>
           <a:lstStyle/>
           <a:p>
-            <a:endParaRPr lang="en-MY"/>
+            <a:endParaRPr lang="en-MY" dirty="0"/>
           </a:p>
         </p:txBody>
       </p:sp>
@@ -11297,7 +11385,7 @@
                 <a:ea typeface="Calibri" pitchFamily="34" charset="-122"/>
                 <a:cs typeface="Calibri" pitchFamily="34" charset="-120"/>
               </a:rPr>
-              <a:t>Train MSE decreases as width grows — as expected</a:t>
+              <a:t>Train MSE decreases as width grows (as expected)</a:t>
             </a:r>
             <a:endParaRPr lang="en-US" sz="1200" dirty="0"/>
           </a:p>
@@ -11318,7 +11406,7 @@
                 <a:ea typeface="Calibri" pitchFamily="34" charset="-122"/>
                 <a:cs typeface="Calibri" pitchFamily="34" charset="-120"/>
               </a:rPr>
-              <a:t>Test MSE curve remains smooth — no spike visible</a:t>
+              <a:t>Test MSE curve remains smooth (no spike visible)</a:t>
             </a:r>
             <a:endParaRPr lang="en-US" sz="1200" dirty="0"/>
           </a:p>
@@ -11504,7 +11592,7 @@
           <a:bodyPr/>
           <a:lstStyle/>
           <a:p>
-            <a:endParaRPr lang="en-MY"/>
+            <a:endParaRPr lang="en-MY" dirty="0"/>
           </a:p>
         </p:txBody>
       </p:sp>
@@ -11536,7 +11624,7 @@
           <a:bodyPr/>
           <a:lstStyle/>
           <a:p>
-            <a:endParaRPr lang="en-MY"/>
+            <a:endParaRPr lang="en-MY" dirty="0"/>
           </a:p>
         </p:txBody>
       </p:sp>
@@ -11783,7 +11871,7 @@
           <a:bodyPr/>
           <a:lstStyle/>
           <a:p>
-            <a:endParaRPr lang="en-MY"/>
+            <a:endParaRPr lang="en-MY" dirty="0"/>
           </a:p>
         </p:txBody>
       </p:sp>
@@ -11926,7 +12014,7 @@
           <a:bodyPr/>
           <a:lstStyle/>
           <a:p>
-            <a:endParaRPr lang="en-MY"/>
+            <a:endParaRPr lang="en-MY" dirty="0"/>
           </a:p>
         </p:txBody>
       </p:sp>
@@ -12038,7 +12126,7 @@
           <a:bodyPr/>
           <a:lstStyle/>
           <a:p>
-            <a:endParaRPr lang="en-MY"/>
+            <a:endParaRPr lang="en-MY" dirty="0"/>
           </a:p>
         </p:txBody>
       </p:sp>
@@ -12077,7 +12165,7 @@
           <a:bodyPr/>
           <a:lstStyle/>
           <a:p>
-            <a:endParaRPr lang="en-MY"/>
+            <a:endParaRPr lang="en-MY" dirty="0"/>
           </a:p>
         </p:txBody>
       </p:sp>
@@ -12109,7 +12197,7 @@
           <a:bodyPr/>
           <a:lstStyle/>
           <a:p>
-            <a:endParaRPr lang="en-MY"/>
+            <a:endParaRPr lang="en-MY" dirty="0"/>
           </a:p>
         </p:txBody>
       </p:sp>
@@ -12180,7 +12268,7 @@
           <a:bodyPr/>
           <a:lstStyle/>
           <a:p>
-            <a:endParaRPr lang="en-MY"/>
+            <a:endParaRPr lang="en-MY" dirty="0"/>
           </a:p>
         </p:txBody>
       </p:sp>
@@ -12251,7 +12339,7 @@
           <a:bodyPr/>
           <a:lstStyle/>
           <a:p>
-            <a:endParaRPr lang="en-MY"/>
+            <a:endParaRPr lang="en-MY" dirty="0"/>
           </a:p>
         </p:txBody>
       </p:sp>
@@ -12322,7 +12410,7 @@
           <a:bodyPr/>
           <a:lstStyle/>
           <a:p>
-            <a:endParaRPr lang="en-MY"/>
+            <a:endParaRPr lang="en-MY" dirty="0"/>
           </a:p>
         </p:txBody>
       </p:sp>
@@ -12449,7 +12537,7 @@
           <a:bodyPr/>
           <a:lstStyle/>
           <a:p>
-            <a:endParaRPr lang="en-MY"/>
+            <a:endParaRPr lang="en-MY" dirty="0"/>
           </a:p>
         </p:txBody>
       </p:sp>
@@ -12728,7 +12816,7 @@
           <a:bodyPr/>
           <a:lstStyle/>
           <a:p>
-            <a:endParaRPr lang="en-MY"/>
+            <a:endParaRPr lang="en-MY" dirty="0"/>
           </a:p>
         </p:txBody>
       </p:sp>
@@ -12760,7 +12848,7 @@
           <a:bodyPr/>
           <a:lstStyle/>
           <a:p>
-            <a:endParaRPr lang="en-MY"/>
+            <a:endParaRPr lang="en-MY" dirty="0"/>
           </a:p>
         </p:txBody>
       </p:sp>
@@ -13397,7 +13485,7 @@
           <a:bodyPr/>
           <a:lstStyle/>
           <a:p>
-            <a:endParaRPr lang="en-MY"/>
+            <a:endParaRPr lang="en-MY" dirty="0"/>
           </a:p>
         </p:txBody>
       </p:sp>
@@ -13509,7 +13597,7 @@
           <a:bodyPr/>
           <a:lstStyle/>
           <a:p>
-            <a:endParaRPr lang="en-MY"/>
+            <a:endParaRPr lang="en-MY" dirty="0"/>
           </a:p>
         </p:txBody>
       </p:sp>
@@ -13557,7 +13645,7 @@
           <a:bodyPr/>
           <a:lstStyle/>
           <a:p>
-            <a:endParaRPr lang="en-MY"/>
+            <a:endParaRPr lang="en-MY" dirty="0"/>
           </a:p>
         </p:txBody>
       </p:sp>
@@ -13652,7 +13740,7 @@
           <a:bodyPr/>
           <a:lstStyle/>
           <a:p>
-            <a:endParaRPr lang="en-MY"/>
+            <a:endParaRPr lang="en-MY" dirty="0"/>
           </a:p>
         </p:txBody>
       </p:sp>
@@ -13850,7 +13938,7 @@
           <a:bodyPr/>
           <a:lstStyle/>
           <a:p>
-            <a:endParaRPr lang="en-MY"/>
+            <a:endParaRPr lang="en-MY" dirty="0"/>
           </a:p>
         </p:txBody>
       </p:sp>
@@ -13993,7 +14081,7 @@
           <a:bodyPr/>
           <a:lstStyle/>
           <a:p>
-            <a:endParaRPr lang="en-MY"/>
+            <a:endParaRPr lang="en-MY" dirty="0"/>
           </a:p>
         </p:txBody>
       </p:sp>
@@ -14025,7 +14113,7 @@
           <a:bodyPr/>
           <a:lstStyle/>
           <a:p>
-            <a:endParaRPr lang="en-MY"/>
+            <a:endParaRPr lang="en-MY" dirty="0"/>
           </a:p>
         </p:txBody>
       </p:sp>
@@ -14135,7 +14223,7 @@
           <a:bodyPr/>
           <a:lstStyle/>
           <a:p>
-            <a:endParaRPr lang="en-MY"/>
+            <a:endParaRPr lang="en-MY" dirty="0"/>
           </a:p>
         </p:txBody>
       </p:sp>

--- a/slides/double_descent_presentation.pptx
+++ b/slides/double_descent_presentation.pptx
@@ -144,7 +144,7 @@
 <file path=ppt/revisionInfo.xml><?xml version="1.0" encoding="utf-8"?>
 <p1510:revInfo xmlns:a="http://schemas.openxmlformats.org/drawingml/2006/main" xmlns:r="http://schemas.openxmlformats.org/officeDocument/2006/relationships" xmlns:p1510="http://schemas.microsoft.com/office/powerpoint/2015/10/main">
   <p1510:revLst>
-    <p1510:client id="{C78EDCF7-2E7A-475C-B070-2104BFA8BAA3}" v="23" dt="2026-03-17T09:25:04.719"/>
+    <p1510:client id="{C78EDCF7-2E7A-475C-B070-2104BFA8BAA3}" v="24" dt="2026-03-17T16:14:12.037"/>
   </p1510:revLst>
 </p1510:revInfo>
 </file>
@@ -154,7 +154,7 @@
   <pc:docChgLst>
     <pc:chgData name="Le Jiayang" userId="72dc08ead7328938" providerId="LiveId" clId="{2E694533-A3D7-44F0-8378-4BF09FAADAF7}"/>
     <pc:docChg chg="undo custSel delSld modSld modMainMaster">
-      <pc:chgData name="Le Jiayang" userId="72dc08ead7328938" providerId="LiveId" clId="{2E694533-A3D7-44F0-8378-4BF09FAADAF7}" dt="2026-03-17T09:26:15.888" v="228" actId="20577"/>
+      <pc:chgData name="Le Jiayang" userId="72dc08ead7328938" providerId="LiveId" clId="{2E694533-A3D7-44F0-8378-4BF09FAADAF7}" dt="2026-03-17T16:15:03.163" v="261" actId="20577"/>
       <pc:docMkLst>
         <pc:docMk/>
       </pc:docMkLst>
@@ -222,7 +222,7 @@
         </pc:spChg>
       </pc:sldChg>
       <pc:sldChg chg="modSp mod setBg">
-        <pc:chgData name="Le Jiayang" userId="72dc08ead7328938" providerId="LiveId" clId="{2E694533-A3D7-44F0-8378-4BF09FAADAF7}" dt="2026-03-13T11:42:03.799" v="138" actId="20577"/>
+        <pc:chgData name="Le Jiayang" userId="72dc08ead7328938" providerId="LiveId" clId="{2E694533-A3D7-44F0-8378-4BF09FAADAF7}" dt="2026-03-17T16:13:57.233" v="240" actId="1076"/>
         <pc:sldMkLst>
           <pc:docMk/>
           <pc:sldMk cId="0" sldId="257"/>
@@ -236,7 +236,15 @@
           </ac:spMkLst>
         </pc:spChg>
         <pc:spChg chg="mod">
-          <ac:chgData name="Le Jiayang" userId="72dc08ead7328938" providerId="LiveId" clId="{2E694533-A3D7-44F0-8378-4BF09FAADAF7}" dt="2026-03-13T11:42:03.799" v="138" actId="20577"/>
+          <ac:chgData name="Le Jiayang" userId="72dc08ead7328938" providerId="LiveId" clId="{2E694533-A3D7-44F0-8378-4BF09FAADAF7}" dt="2026-03-17T16:13:15.318" v="233" actId="1076"/>
+          <ac:spMkLst>
+            <pc:docMk/>
+            <pc:sldMk cId="0" sldId="257"/>
+            <ac:spMk id="9" creationId="{00000000-0000-0000-0000-000000000000}"/>
+          </ac:spMkLst>
+        </pc:spChg>
+        <pc:spChg chg="mod">
+          <ac:chgData name="Le Jiayang" userId="72dc08ead7328938" providerId="LiveId" clId="{2E694533-A3D7-44F0-8378-4BF09FAADAF7}" dt="2026-03-17T16:13:57.233" v="240" actId="1076"/>
           <ac:spMkLst>
             <pc:docMk/>
             <pc:sldMk cId="0" sldId="257"/>
@@ -249,6 +257,22 @@
             <pc:docMk/>
             <pc:sldMk cId="0" sldId="257"/>
             <ac:spMk id="13" creationId="{00000000-0000-0000-0000-000000000000}"/>
+          </ac:spMkLst>
+        </pc:spChg>
+        <pc:spChg chg="ord">
+          <ac:chgData name="Le Jiayang" userId="72dc08ead7328938" providerId="LiveId" clId="{2E694533-A3D7-44F0-8378-4BF09FAADAF7}" dt="2026-03-17T16:13:39.617" v="237" actId="167"/>
+          <ac:spMkLst>
+            <pc:docMk/>
+            <pc:sldMk cId="0" sldId="257"/>
+            <ac:spMk id="14" creationId="{00000000-0000-0000-0000-000000000000}"/>
+          </ac:spMkLst>
+        </pc:spChg>
+        <pc:spChg chg="mod">
+          <ac:chgData name="Le Jiayang" userId="72dc08ead7328938" providerId="LiveId" clId="{2E694533-A3D7-44F0-8378-4BF09FAADAF7}" dt="2026-03-17T16:13:51.339" v="239" actId="1076"/>
+          <ac:spMkLst>
+            <pc:docMk/>
+            <pc:sldMk cId="0" sldId="257"/>
+            <ac:spMk id="17" creationId="{00000000-0000-0000-0000-000000000000}"/>
           </ac:spMkLst>
         </pc:spChg>
         <pc:spChg chg="mod">
@@ -374,12 +398,20 @@
           </ac:spMkLst>
         </pc:spChg>
       </pc:sldChg>
-      <pc:sldChg chg="setBg">
-        <pc:chgData name="Le Jiayang" userId="72dc08ead7328938" providerId="LiveId" clId="{2E694533-A3D7-44F0-8378-4BF09FAADAF7}" dt="2026-03-13T10:57:37.500" v="5"/>
+      <pc:sldChg chg="modSp mod setBg">
+        <pc:chgData name="Le Jiayang" userId="72dc08ead7328938" providerId="LiveId" clId="{2E694533-A3D7-44F0-8378-4BF09FAADAF7}" dt="2026-03-17T16:14:50.620" v="246" actId="1076"/>
         <pc:sldMkLst>
           <pc:docMk/>
           <pc:sldMk cId="0" sldId="264"/>
         </pc:sldMkLst>
+        <pc:spChg chg="mod">
+          <ac:chgData name="Le Jiayang" userId="72dc08ead7328938" providerId="LiveId" clId="{2E694533-A3D7-44F0-8378-4BF09FAADAF7}" dt="2026-03-17T16:14:50.620" v="246" actId="1076"/>
+          <ac:spMkLst>
+            <pc:docMk/>
+            <pc:sldMk cId="0" sldId="264"/>
+            <ac:spMk id="5" creationId="{00000000-0000-0000-0000-000000000000}"/>
+          </ac:spMkLst>
+        </pc:spChg>
       </pc:sldChg>
       <pc:sldChg chg="delSp modSp mod setBg">
         <pc:chgData name="Le Jiayang" userId="72dc08ead7328938" providerId="LiveId" clId="{2E694533-A3D7-44F0-8378-4BF09FAADAF7}" dt="2026-03-13T11:40:35.060" v="136" actId="478"/>
@@ -396,12 +428,20 @@
           </ac:spMkLst>
         </pc:spChg>
       </pc:sldChg>
-      <pc:sldChg chg="setBg">
-        <pc:chgData name="Le Jiayang" userId="72dc08ead7328938" providerId="LiveId" clId="{2E694533-A3D7-44F0-8378-4BF09FAADAF7}" dt="2026-03-13T10:57:37.500" v="5"/>
+      <pc:sldChg chg="modSp mod setBg">
+        <pc:chgData name="Le Jiayang" userId="72dc08ead7328938" providerId="LiveId" clId="{2E694533-A3D7-44F0-8378-4BF09FAADAF7}" dt="2026-03-17T16:15:03.163" v="261" actId="20577"/>
         <pc:sldMkLst>
           <pc:docMk/>
           <pc:sldMk cId="0" sldId="267"/>
         </pc:sldMkLst>
+        <pc:spChg chg="mod">
+          <ac:chgData name="Le Jiayang" userId="72dc08ead7328938" providerId="LiveId" clId="{2E694533-A3D7-44F0-8378-4BF09FAADAF7}" dt="2026-03-17T16:15:03.163" v="261" actId="20577"/>
+          <ac:spMkLst>
+            <pc:docMk/>
+            <pc:sldMk cId="0" sldId="267"/>
+            <ac:spMk id="5" creationId="{00000000-0000-0000-0000-000000000000}"/>
+          </ac:spMkLst>
+        </pc:spChg>
       </pc:sldChg>
       <pc:sldChg chg="delSp modSp mod setBg">
         <pc:chgData name="Le Jiayang" userId="72dc08ead7328938" providerId="LiveId" clId="{2E694533-A3D7-44F0-8378-4BF09FAADAF7}" dt="2026-03-13T11:40:17.584" v="132" actId="478"/>
@@ -3461,7 +3501,7 @@
         </p:nvSpPr>
         <p:spPr>
           <a:xfrm>
-            <a:off x="914400" y="1920240"/>
+            <a:off x="914400" y="1769364"/>
             <a:ext cx="7315200" cy="1097280"/>
           </a:xfrm>
           <a:prstGeom prst="rect">
@@ -3486,7 +3526,7 @@
                 <a:ea typeface="Georgia" pitchFamily="34" charset="-122"/>
                 <a:cs typeface="Georgia" pitchFamily="34" charset="-120"/>
               </a:rPr>
-              <a:t>Regularization Effects</a:t>
+              <a:t>Optimization Effects</a:t>
             </a:r>
             <a:endParaRPr lang="en-US" sz="4600" dirty="0"/>
           </a:p>
@@ -6754,6 +6794,45 @@
       </p:grpSpPr>
       <p:sp>
         <p:nvSpPr>
+          <p:cNvPr id="14" name="Shape 12"/>
+          <p:cNvSpPr/>
+          <p:nvPr/>
+        </p:nvSpPr>
+        <p:spPr>
+          <a:xfrm>
+            <a:off x="4617720" y="1005840"/>
+            <a:ext cx="1920240" cy="3291840"/>
+          </a:xfrm>
+          <a:prstGeom prst="rect">
+            <a:avLst/>
+          </a:prstGeom>
+          <a:solidFill>
+            <a:srgbClr val="FFFBEB"/>
+          </a:solidFill>
+          <a:ln w="25400">
+            <a:solidFill>
+              <a:srgbClr val="F59E0B"/>
+            </a:solidFill>
+            <a:prstDash val="solid"/>
+          </a:ln>
+          <a:effectLst>
+            <a:outerShdw blurRad="101600" dist="25400" dir="8100000" algn="bl" rotWithShape="0">
+              <a:srgbClr val="000000">
+                <a:alpha val="10000"/>
+              </a:srgbClr>
+            </a:outerShdw>
+          </a:effectLst>
+        </p:spPr>
+        <p:txBody>
+          <a:bodyPr/>
+          <a:lstStyle/>
+          <a:p>
+            <a:endParaRPr lang="en-MY" dirty="0"/>
+          </a:p>
+        </p:txBody>
+      </p:sp>
+      <p:sp>
+        <p:nvSpPr>
           <p:cNvPr id="2" name="Shape 0"/>
           <p:cNvSpPr/>
           <p:nvPr/>
@@ -7146,7 +7225,7 @@
         </p:nvSpPr>
         <p:spPr>
           <a:xfrm>
-            <a:off x="2468880" y="1920240"/>
+            <a:off x="4617720" y="1977390"/>
             <a:ext cx="1920240" cy="1188720"/>
           </a:xfrm>
           <a:prstGeom prst="rect">
@@ -7213,45 +7292,6 @@
               <a:t>Azis Maaraij Jamil </a:t>
             </a:r>
             <a:endParaRPr lang="en-US" sz="1100" dirty="0"/>
-          </a:p>
-        </p:txBody>
-      </p:sp>
-      <p:sp>
-        <p:nvSpPr>
-          <p:cNvPr id="14" name="Shape 12"/>
-          <p:cNvSpPr/>
-          <p:nvPr/>
-        </p:nvSpPr>
-        <p:spPr>
-          <a:xfrm>
-            <a:off x="4617720" y="1005840"/>
-            <a:ext cx="1920240" cy="3291840"/>
-          </a:xfrm>
-          <a:prstGeom prst="rect">
-            <a:avLst/>
-          </a:prstGeom>
-          <a:solidFill>
-            <a:srgbClr val="FFFBEB"/>
-          </a:solidFill>
-          <a:ln w="25400">
-            <a:solidFill>
-              <a:srgbClr val="F59E0B"/>
-            </a:solidFill>
-            <a:prstDash val="solid"/>
-          </a:ln>
-          <a:effectLst>
-            <a:outerShdw blurRad="101600" dist="25400" dir="8100000" algn="bl" rotWithShape="0">
-              <a:srgbClr val="000000">
-                <a:alpha val="10000"/>
-              </a:srgbClr>
-            </a:outerShdw>
-          </a:effectLst>
-        </p:spPr>
-        <p:txBody>
-          <a:bodyPr/>
-          <a:lstStyle/>
-          <a:p>
-            <a:endParaRPr lang="en-MY" dirty="0"/>
           </a:p>
         </p:txBody>
       </p:sp>
@@ -7334,7 +7374,7 @@
         </p:nvSpPr>
         <p:spPr>
           <a:xfrm>
-            <a:off x="4617720" y="1920240"/>
+            <a:off x="2468880" y="1900518"/>
             <a:ext cx="1920240" cy="1188720"/>
           </a:xfrm>
           <a:prstGeom prst="rect">
@@ -14164,8 +14204,8 @@
         </p:nvSpPr>
         <p:spPr>
           <a:xfrm>
-            <a:off x="914400" y="1920240"/>
-            <a:ext cx="7315200" cy="1097280"/>
+            <a:off x="322729" y="1874520"/>
+            <a:ext cx="8498541" cy="1097280"/>
           </a:xfrm>
           <a:prstGeom prst="rect">
             <a:avLst/>
@@ -14177,11 +14217,9 @@
           <a:bodyPr wrap="square" rtlCol="0" anchor="ctr"/>
           <a:lstStyle/>
           <a:p>
-            <a:pPr marL="0" indent="0" algn="ctr">
-              <a:buNone/>
-            </a:pPr>
-            <a:r>
-              <a:rPr lang="en-US" sz="5200" b="1" dirty="0">
+            <a:pPr algn="ctr"/>
+            <a:r>
+              <a:rPr lang="en-US" sz="4600" b="1" dirty="0">
                 <a:solidFill>
                   <a:srgbClr val="FFFFFF"/>
                 </a:solidFill>
@@ -14189,9 +14227,9 @@
                 <a:ea typeface="Georgia" pitchFamily="34" charset="-122"/>
                 <a:cs typeface="Georgia" pitchFamily="34" charset="-120"/>
               </a:rPr>
-              <a:t>Optimization Effects</a:t>
-            </a:r>
-            <a:endParaRPr lang="en-US" sz="5200" dirty="0"/>
+              <a:t>Regularization Effects</a:t>
+            </a:r>
+            <a:endParaRPr lang="en-US" sz="4600" dirty="0"/>
           </a:p>
         </p:txBody>
       </p:sp>
